--- a/milestone-4.pptx
+++ b/milestone-4.pptx
@@ -4,6 +4,9 @@
   <p:sldMasterIdLst>
     <p:sldMasterId id="2147483908" r:id="rId1"/>
   </p:sldMasterIdLst>
+  <p:notesMasterIdLst>
+    <p:notesMasterId r:id="rId16"/>
+  </p:notesMasterIdLst>
   <p:sldIdLst>
     <p:sldId id="256" r:id="rId2"/>
     <p:sldId id="257" r:id="rId3"/>
@@ -128,7 +131,7 @@
 <file path=ppt/revisionInfo.xml><?xml version="1.0" encoding="utf-8"?>
 <p1510:revInfo xmlns:a="http://schemas.openxmlformats.org/drawingml/2006/main" xmlns:r="http://schemas.openxmlformats.org/officeDocument/2006/relationships" xmlns:p1510="http://schemas.microsoft.com/office/powerpoint/2015/10/main">
   <p1510:revLst>
-    <p1510:client id="{FE1DBD99-3C18-4F9B-9CB0-01CDD467D550}" v="162" dt="2026-03-06T14:44:56.757"/>
+    <p1510:client id="{4D212860-6F3B-4D22-BDDA-4683F633D135}" v="19" dt="2026-03-16T13:56:23.182"/>
   </p1510:revLst>
 </p1510:revInfo>
 </file>
@@ -138,7 +141,7 @@
   <pc:docChgLst>
     <pc:chgData name="Aiswarya Lakshmi Moravaneni" userId="8bd20491d4af265d" providerId="LiveId" clId="{39E3F066-C97A-400C-9E37-AF9E563F03D5}"/>
     <pc:docChg chg="undo redo custSel addSld delSld modSld sldOrd">
-      <pc:chgData name="Aiswarya Lakshmi Moravaneni" userId="8bd20491d4af265d" providerId="LiveId" clId="{39E3F066-C97A-400C-9E37-AF9E563F03D5}" dt="2026-03-06T14:53:37.176" v="575"/>
+      <pc:chgData name="Aiswarya Lakshmi Moravaneni" userId="8bd20491d4af265d" providerId="LiveId" clId="{39E3F066-C97A-400C-9E37-AF9E563F03D5}" dt="2026-03-16T13:56:43.263" v="704" actId="20577"/>
       <pc:docMkLst>
         <pc:docMk/>
       </pc:docMkLst>
@@ -189,21 +192,13 @@
         </pc:spChg>
       </pc:sldChg>
       <pc:sldChg chg="addSp delSp modSp mod delAnim">
-        <pc:chgData name="Aiswarya Lakshmi Moravaneni" userId="8bd20491d4af265d" providerId="LiveId" clId="{39E3F066-C97A-400C-9E37-AF9E563F03D5}" dt="2026-03-06T14:42:42.931" v="505" actId="1076"/>
+        <pc:chgData name="Aiswarya Lakshmi Moravaneni" userId="8bd20491d4af265d" providerId="LiveId" clId="{39E3F066-C97A-400C-9E37-AF9E563F03D5}" dt="2026-03-16T13:50:29.126" v="689" actId="20577"/>
         <pc:sldMkLst>
           <pc:docMk/>
           <pc:sldMk cId="246953022" sldId="258"/>
         </pc:sldMkLst>
-        <pc:spChg chg="del mod">
-          <ac:chgData name="Aiswarya Lakshmi Moravaneni" userId="8bd20491d4af265d" providerId="LiveId" clId="{39E3F066-C97A-400C-9E37-AF9E563F03D5}" dt="2026-03-06T13:45:59.106" v="65" actId="21"/>
-          <ac:spMkLst>
-            <pc:docMk/>
-            <pc:sldMk cId="246953022" sldId="258"/>
-            <ac:spMk id="2" creationId="{C00690A3-F3E8-49A7-9A64-D78A1B3228DD}"/>
-          </ac:spMkLst>
-        </pc:spChg>
         <pc:spChg chg="mod">
-          <ac:chgData name="Aiswarya Lakshmi Moravaneni" userId="8bd20491d4af265d" providerId="LiveId" clId="{39E3F066-C97A-400C-9E37-AF9E563F03D5}" dt="2026-03-06T14:42:42.931" v="505" actId="1076"/>
+          <ac:chgData name="Aiswarya Lakshmi Moravaneni" userId="8bd20491d4af265d" providerId="LiveId" clId="{39E3F066-C97A-400C-9E37-AF9E563F03D5}" dt="2026-03-16T13:34:41.476" v="585" actId="1076"/>
           <ac:spMkLst>
             <pc:docMk/>
             <pc:sldMk cId="246953022" sldId="258"/>
@@ -211,7 +206,7 @@
           </ac:spMkLst>
         </pc:spChg>
         <pc:spChg chg="mod">
-          <ac:chgData name="Aiswarya Lakshmi Moravaneni" userId="8bd20491d4af265d" providerId="LiveId" clId="{39E3F066-C97A-400C-9E37-AF9E563F03D5}" dt="2026-03-06T14:42:31.824" v="503" actId="1076"/>
+          <ac:chgData name="Aiswarya Lakshmi Moravaneni" userId="8bd20491d4af265d" providerId="LiveId" clId="{39E3F066-C97A-400C-9E37-AF9E563F03D5}" dt="2026-03-16T13:50:29.126" v="689" actId="20577"/>
           <ac:spMkLst>
             <pc:docMk/>
             <pc:sldMk cId="246953022" sldId="258"/>
@@ -219,7 +214,7 @@
           </ac:spMkLst>
         </pc:spChg>
         <pc:spChg chg="add mod">
-          <ac:chgData name="Aiswarya Lakshmi Moravaneni" userId="8bd20491d4af265d" providerId="LiveId" clId="{39E3F066-C97A-400C-9E37-AF9E563F03D5}" dt="2026-03-06T14:42:28.019" v="502" actId="1076"/>
+          <ac:chgData name="Aiswarya Lakshmi Moravaneni" userId="8bd20491d4af265d" providerId="LiveId" clId="{39E3F066-C97A-400C-9E37-AF9E563F03D5}" dt="2026-03-16T13:34:54.394" v="587" actId="1076"/>
           <ac:spMkLst>
             <pc:docMk/>
             <pc:sldMk cId="246953022" sldId="258"/>
@@ -305,21 +300,6 @@
           </ac:picMkLst>
         </pc:picChg>
       </pc:sldChg>
-      <pc:sldChg chg="modSp del mod">
-        <pc:chgData name="Aiswarya Lakshmi Moravaneni" userId="8bd20491d4af265d" providerId="LiveId" clId="{39E3F066-C97A-400C-9E37-AF9E563F03D5}" dt="2026-03-06T12:57:04.346" v="7" actId="2696"/>
-        <pc:sldMkLst>
-          <pc:docMk/>
-          <pc:sldMk cId="3183802" sldId="261"/>
-        </pc:sldMkLst>
-        <pc:spChg chg="mod">
-          <ac:chgData name="Aiswarya Lakshmi Moravaneni" userId="8bd20491d4af265d" providerId="LiveId" clId="{39E3F066-C97A-400C-9E37-AF9E563F03D5}" dt="2026-03-06T12:53:57.951" v="0" actId="14100"/>
-          <ac:spMkLst>
-            <pc:docMk/>
-            <pc:sldMk cId="3183802" sldId="261"/>
-            <ac:spMk id="3" creationId="{157EFE83-3B93-FCD0-EED4-745A7BC25C71}"/>
-          </ac:spMkLst>
-        </pc:spChg>
-      </pc:sldChg>
       <pc:sldChg chg="addSp delSp modSp new mod">
         <pc:chgData name="Aiswarya Lakshmi Moravaneni" userId="8bd20491d4af265d" providerId="LiveId" clId="{39E3F066-C97A-400C-9E37-AF9E563F03D5}" dt="2026-03-06T14:44:15.571" v="519" actId="27636"/>
         <pc:sldMkLst>
@@ -332,14 +312,6 @@
             <pc:docMk/>
             <pc:sldMk cId="2263421344" sldId="262"/>
             <ac:spMk id="2" creationId="{9AD9AC71-A7CB-89A3-8FC3-293056832982}"/>
-          </ac:spMkLst>
-        </pc:spChg>
-        <pc:spChg chg="del">
-          <ac:chgData name="Aiswarya Lakshmi Moravaneni" userId="8bd20491d4af265d" providerId="LiveId" clId="{39E3F066-C97A-400C-9E37-AF9E563F03D5}" dt="2026-03-06T12:56:42.756" v="6"/>
-          <ac:spMkLst>
-            <pc:docMk/>
-            <pc:sldMk cId="2263421344" sldId="262"/>
-            <ac:spMk id="3" creationId="{49ED88A0-5621-3BE8-92B9-C78232B92B61}"/>
           </ac:spMkLst>
         </pc:spChg>
         <pc:spChg chg="mod">
@@ -373,14 +345,6 @@
             <ac:spMk id="2" creationId="{DB2DBF4A-5502-EB2C-68B7-4A2CCC0A467A}"/>
           </ac:spMkLst>
         </pc:spChg>
-        <pc:spChg chg="del mod">
-          <ac:chgData name="Aiswarya Lakshmi Moravaneni" userId="8bd20491d4af265d" providerId="LiveId" clId="{39E3F066-C97A-400C-9E37-AF9E563F03D5}" dt="2026-03-06T13:32:20.334" v="33" actId="22"/>
-          <ac:spMkLst>
-            <pc:docMk/>
-            <pc:sldMk cId="3070386333" sldId="263"/>
-            <ac:spMk id="3" creationId="{04AA99F3-5AA8-4047-9017-6DCECBC60438}"/>
-          </ac:spMkLst>
-        </pc:spChg>
         <pc:spChg chg="mod">
           <ac:chgData name="Aiswarya Lakshmi Moravaneni" userId="8bd20491d4af265d" providerId="LiveId" clId="{39E3F066-C97A-400C-9E37-AF9E563F03D5}" dt="2026-03-06T14:50:19.656" v="573" actId="1076"/>
           <ac:spMkLst>
@@ -395,14 +359,6 @@
             <pc:docMk/>
             <pc:sldMk cId="3070386333" sldId="263"/>
             <ac:picMk id="6" creationId="{CE08A884-9014-6C6A-769D-D6A7EECE308D}"/>
-          </ac:picMkLst>
-        </pc:picChg>
-        <pc:picChg chg="add">
-          <ac:chgData name="Aiswarya Lakshmi Moravaneni" userId="8bd20491d4af265d" providerId="LiveId" clId="{39E3F066-C97A-400C-9E37-AF9E563F03D5}" dt="2026-03-06T13:26:45.144" v="27"/>
-          <ac:picMkLst>
-            <pc:docMk/>
-            <pc:sldMk cId="3070386333" sldId="263"/>
-            <ac:picMk id="2050" creationId="{1C022C2E-3AC9-3C3A-6CD8-3B5250B76161}"/>
           </ac:picMkLst>
         </pc:picChg>
       </pc:sldChg>
@@ -443,14 +399,6 @@
             <ac:spMk id="2" creationId="{97A3A2FD-866B-4BF3-2837-00894306E0AB}"/>
           </ac:spMkLst>
         </pc:spChg>
-        <pc:spChg chg="del">
-          <ac:chgData name="Aiswarya Lakshmi Moravaneni" userId="8bd20491d4af265d" providerId="LiveId" clId="{39E3F066-C97A-400C-9E37-AF9E563F03D5}" dt="2026-03-06T13:51:07.320" v="112" actId="22"/>
-          <ac:spMkLst>
-            <pc:docMk/>
-            <pc:sldMk cId="515763324" sldId="265"/>
-            <ac:spMk id="3" creationId="{A0A0EE43-F910-D2DE-7DB2-6EF3FA98EB9C}"/>
-          </ac:spMkLst>
-        </pc:spChg>
         <pc:spChg chg="mod">
           <ac:chgData name="Aiswarya Lakshmi Moravaneni" userId="8bd20491d4af265d" providerId="LiveId" clId="{39E3F066-C97A-400C-9E37-AF9E563F03D5}" dt="2026-03-06T14:50:03.610" v="572" actId="27636"/>
           <ac:spMkLst>
@@ -459,62 +407,6 @@
             <ac:spMk id="4" creationId="{32E3F66D-192D-DB0B-2EE8-B3D157739998}"/>
           </ac:spMkLst>
         </pc:spChg>
-        <pc:spChg chg="add del mod">
-          <ac:chgData name="Aiswarya Lakshmi Moravaneni" userId="8bd20491d4af265d" providerId="LiveId" clId="{39E3F066-C97A-400C-9E37-AF9E563F03D5}" dt="2026-03-06T14:04:29.179" v="160"/>
-          <ac:spMkLst>
-            <pc:docMk/>
-            <pc:sldMk cId="515763324" sldId="265"/>
-            <ac:spMk id="9" creationId="{9009101E-A204-D650-BE30-2C7996F2E735}"/>
-          </ac:spMkLst>
-        </pc:spChg>
-        <pc:spChg chg="add del mod">
-          <ac:chgData name="Aiswarya Lakshmi Moravaneni" userId="8bd20491d4af265d" providerId="LiveId" clId="{39E3F066-C97A-400C-9E37-AF9E563F03D5}" dt="2026-03-06T14:04:46.241" v="167"/>
-          <ac:spMkLst>
-            <pc:docMk/>
-            <pc:sldMk cId="515763324" sldId="265"/>
-            <ac:spMk id="10" creationId="{B1B80EC4-6912-8AA2-BD80-F28A80C1924E}"/>
-          </ac:spMkLst>
-        </pc:spChg>
-        <pc:spChg chg="add mod">
-          <ac:chgData name="Aiswarya Lakshmi Moravaneni" userId="8bd20491d4af265d" providerId="LiveId" clId="{39E3F066-C97A-400C-9E37-AF9E563F03D5}" dt="2026-03-06T14:04:46.223" v="166"/>
-          <ac:spMkLst>
-            <pc:docMk/>
-            <pc:sldMk cId="515763324" sldId="265"/>
-            <ac:spMk id="11" creationId="{C1C18A05-0070-5BBA-3481-5E06AF4C4C23}"/>
-          </ac:spMkLst>
-        </pc:spChg>
-        <pc:spChg chg="add del mod">
-          <ac:chgData name="Aiswarya Lakshmi Moravaneni" userId="8bd20491d4af265d" providerId="LiveId" clId="{39E3F066-C97A-400C-9E37-AF9E563F03D5}" dt="2026-03-06T14:10:21.890" v="195" actId="21"/>
-          <ac:spMkLst>
-            <pc:docMk/>
-            <pc:sldMk cId="515763324" sldId="265"/>
-            <ac:spMk id="15" creationId="{320A6ABF-8290-5C9C-3048-F987EC079B23}"/>
-          </ac:spMkLst>
-        </pc:spChg>
-        <pc:picChg chg="add del mod ord modCrop">
-          <ac:chgData name="Aiswarya Lakshmi Moravaneni" userId="8bd20491d4af265d" providerId="LiveId" clId="{39E3F066-C97A-400C-9E37-AF9E563F03D5}" dt="2026-03-06T14:04:17.105" v="159" actId="21"/>
-          <ac:picMkLst>
-            <pc:docMk/>
-            <pc:sldMk cId="515763324" sldId="265"/>
-            <ac:picMk id="6" creationId="{0DDBFF36-B8D4-DE9E-F23F-04F1BBDFB5C4}"/>
-          </ac:picMkLst>
-        </pc:picChg>
-        <pc:picChg chg="add mod">
-          <ac:chgData name="Aiswarya Lakshmi Moravaneni" userId="8bd20491d4af265d" providerId="LiveId" clId="{39E3F066-C97A-400C-9E37-AF9E563F03D5}" dt="2026-03-06T14:01:42.492" v="140"/>
-          <ac:picMkLst>
-            <pc:docMk/>
-            <pc:sldMk cId="515763324" sldId="265"/>
-            <ac:picMk id="7" creationId="{EC8CDCBA-0CB4-3A76-EF88-F13D8D1F6D0B}"/>
-          </ac:picMkLst>
-        </pc:picChg>
-        <pc:picChg chg="add del mod modCrop">
-          <ac:chgData name="Aiswarya Lakshmi Moravaneni" userId="8bd20491d4af265d" providerId="LiveId" clId="{39E3F066-C97A-400C-9E37-AF9E563F03D5}" dt="2026-03-06T14:10:15.281" v="193" actId="21"/>
-          <ac:picMkLst>
-            <pc:docMk/>
-            <pc:sldMk cId="515763324" sldId="265"/>
-            <ac:picMk id="12" creationId="{C385C037-91EE-1DC6-B92A-078A4DE06ED8}"/>
-          </ac:picMkLst>
-        </pc:picChg>
         <pc:picChg chg="add mod">
           <ac:chgData name="Aiswarya Lakshmi Moravaneni" userId="8bd20491d4af265d" providerId="LiveId" clId="{39E3F066-C97A-400C-9E37-AF9E563F03D5}" dt="2026-03-06T14:10:28.727" v="196" actId="1076"/>
           <ac:picMkLst>
@@ -525,7 +417,7 @@
         </pc:picChg>
       </pc:sldChg>
       <pc:sldChg chg="addSp delSp modSp add mod ord">
-        <pc:chgData name="Aiswarya Lakshmi Moravaneni" userId="8bd20491d4af265d" providerId="LiveId" clId="{39E3F066-C97A-400C-9E37-AF9E563F03D5}" dt="2026-03-06T14:53:37.176" v="575"/>
+        <pc:chgData name="Aiswarya Lakshmi Moravaneni" userId="8bd20491d4af265d" providerId="LiveId" clId="{39E3F066-C97A-400C-9E37-AF9E563F03D5}" dt="2026-03-16T13:33:19.378" v="578" actId="14100"/>
         <pc:sldMkLst>
           <pc:docMk/>
           <pc:sldMk cId="2296938631" sldId="266"/>
@@ -538,92 +430,22 @@
             <ac:spMk id="2" creationId="{CF078399-BB25-8A4A-D481-7759BC0A754E}"/>
           </ac:spMkLst>
         </pc:spChg>
-        <pc:spChg chg="add mod">
-          <ac:chgData name="Aiswarya Lakshmi Moravaneni" userId="8bd20491d4af265d" providerId="LiveId" clId="{39E3F066-C97A-400C-9E37-AF9E563F03D5}" dt="2026-03-06T14:03:55.646" v="152" actId="14100"/>
-          <ac:spMkLst>
-            <pc:docMk/>
-            <pc:sldMk cId="2296938631" sldId="266"/>
-            <ac:spMk id="3" creationId="{CE01F704-5D09-5141-4B6E-364421C49A04}"/>
-          </ac:spMkLst>
-        </pc:spChg>
         <pc:spChg chg="mod">
-          <ac:chgData name="Aiswarya Lakshmi Moravaneni" userId="8bd20491d4af265d" providerId="LiveId" clId="{39E3F066-C97A-400C-9E37-AF9E563F03D5}" dt="2026-03-06T14:49:22.226" v="564" actId="27636"/>
+          <ac:chgData name="Aiswarya Lakshmi Moravaneni" userId="8bd20491d4af265d" providerId="LiveId" clId="{39E3F066-C97A-400C-9E37-AF9E563F03D5}" dt="2026-03-16T13:33:11.279" v="577" actId="14100"/>
           <ac:spMkLst>
             <pc:docMk/>
             <pc:sldMk cId="2296938631" sldId="266"/>
             <ac:spMk id="4" creationId="{8D6A320A-ABE4-B27A-C6AD-415422BF98EF}"/>
           </ac:spMkLst>
         </pc:spChg>
-        <pc:spChg chg="add">
-          <ac:chgData name="Aiswarya Lakshmi Moravaneni" userId="8bd20491d4af265d" providerId="LiveId" clId="{39E3F066-C97A-400C-9E37-AF9E563F03D5}" dt="2026-03-06T14:03:52.936" v="151"/>
-          <ac:spMkLst>
-            <pc:docMk/>
-            <pc:sldMk cId="2296938631" sldId="266"/>
-            <ac:spMk id="5" creationId="{359EFC05-4051-112A-7A69-F83B5837CBFF}"/>
-          </ac:spMkLst>
-        </pc:spChg>
-        <pc:spChg chg="add del mod">
-          <ac:chgData name="Aiswarya Lakshmi Moravaneni" userId="8bd20491d4af265d" providerId="LiveId" clId="{39E3F066-C97A-400C-9E37-AF9E563F03D5}" dt="2026-03-06T14:10:43.842" v="198" actId="21"/>
-          <ac:spMkLst>
-            <pc:docMk/>
-            <pc:sldMk cId="2296938631" sldId="266"/>
-            <ac:spMk id="9" creationId="{DE577C4E-755F-3BE7-48B1-6918B48854E8}"/>
-          </ac:spMkLst>
-        </pc:spChg>
-        <pc:spChg chg="add mod">
-          <ac:chgData name="Aiswarya Lakshmi Moravaneni" userId="8bd20491d4af265d" providerId="LiveId" clId="{39E3F066-C97A-400C-9E37-AF9E563F03D5}" dt="2026-03-06T14:11:25.230" v="200"/>
-          <ac:spMkLst>
-            <pc:docMk/>
-            <pc:sldMk cId="2296938631" sldId="266"/>
-            <ac:spMk id="10" creationId="{DE577C4E-755F-3BE7-48B1-6918B48854E8}"/>
-          </ac:spMkLst>
-        </pc:spChg>
-        <pc:picChg chg="del mod">
-          <ac:chgData name="Aiswarya Lakshmi Moravaneni" userId="8bd20491d4af265d" providerId="LiveId" clId="{39E3F066-C97A-400C-9E37-AF9E563F03D5}" dt="2026-03-06T14:10:36.749" v="197" actId="21"/>
-          <ac:picMkLst>
-            <pc:docMk/>
-            <pc:sldMk cId="2296938631" sldId="266"/>
-            <ac:picMk id="6" creationId="{B8D64364-30AC-77BD-C2BC-40FA3379113A}"/>
-          </ac:picMkLst>
-        </pc:picChg>
         <pc:picChg chg="add mod">
-          <ac:chgData name="Aiswarya Lakshmi Moravaneni" userId="8bd20491d4af265d" providerId="LiveId" clId="{39E3F066-C97A-400C-9E37-AF9E563F03D5}" dt="2026-03-06T14:10:51.166" v="199" actId="1076"/>
+          <ac:chgData name="Aiswarya Lakshmi Moravaneni" userId="8bd20491d4af265d" providerId="LiveId" clId="{39E3F066-C97A-400C-9E37-AF9E563F03D5}" dt="2026-03-16T13:33:19.378" v="578" actId="14100"/>
           <ac:picMkLst>
             <pc:docMk/>
             <pc:sldMk cId="2296938631" sldId="266"/>
             <ac:picMk id="7" creationId="{D1FFBE11-6842-0BB5-AE95-D39AB6B2CCF4}"/>
           </ac:picMkLst>
         </pc:picChg>
-      </pc:sldChg>
-      <pc:sldChg chg="modSp new del">
-        <pc:chgData name="Aiswarya Lakshmi Moravaneni" userId="8bd20491d4af265d" providerId="LiveId" clId="{39E3F066-C97A-400C-9E37-AF9E563F03D5}" dt="2026-03-06T13:54:46.801" v="134" actId="2696"/>
-        <pc:sldMkLst>
-          <pc:docMk/>
-          <pc:sldMk cId="2891506413" sldId="266"/>
-        </pc:sldMkLst>
-        <pc:spChg chg="mod">
-          <ac:chgData name="Aiswarya Lakshmi Moravaneni" userId="8bd20491d4af265d" providerId="LiveId" clId="{39E3F066-C97A-400C-9E37-AF9E563F03D5}" dt="2026-03-06T13:54:13.902" v="131"/>
-          <ac:spMkLst>
-            <pc:docMk/>
-            <pc:sldMk cId="2891506413" sldId="266"/>
-            <ac:spMk id="2" creationId="{87E79D15-9D40-A5F7-7961-C3E16B041E96}"/>
-          </ac:spMkLst>
-        </pc:spChg>
-        <pc:spChg chg="mod">
-          <ac:chgData name="Aiswarya Lakshmi Moravaneni" userId="8bd20491d4af265d" providerId="LiveId" clId="{39E3F066-C97A-400C-9E37-AF9E563F03D5}" dt="2026-03-06T13:54:34.740" v="133"/>
-          <ac:spMkLst>
-            <pc:docMk/>
-            <pc:sldMk cId="2891506413" sldId="266"/>
-            <ac:spMk id="4" creationId="{3054373A-88E1-9166-66A7-ACA66050B162}"/>
-          </ac:spMkLst>
-        </pc:spChg>
-      </pc:sldChg>
-      <pc:sldChg chg="add del">
-        <pc:chgData name="Aiswarya Lakshmi Moravaneni" userId="8bd20491d4af265d" providerId="LiveId" clId="{39E3F066-C97A-400C-9E37-AF9E563F03D5}" dt="2026-03-06T13:55:14.563" v="137"/>
-        <pc:sldMkLst>
-          <pc:docMk/>
-          <pc:sldMk cId="1695783024" sldId="267"/>
-        </pc:sldMkLst>
       </pc:sldChg>
       <pc:sldChg chg="addSp delSp modSp add mod">
         <pc:chgData name="Aiswarya Lakshmi Moravaneni" userId="8bd20491d4af265d" providerId="LiveId" clId="{39E3F066-C97A-400C-9E37-AF9E563F03D5}" dt="2026-03-06T14:49:03.317" v="559" actId="14100"/>
@@ -639,14 +461,6 @@
             <ac:spMk id="2" creationId="{9372A306-99FF-DEE3-D3E4-0B982017F958}"/>
           </ac:spMkLst>
         </pc:spChg>
-        <pc:spChg chg="add">
-          <ac:chgData name="Aiswarya Lakshmi Moravaneni" userId="8bd20491d4af265d" providerId="LiveId" clId="{39E3F066-C97A-400C-9E37-AF9E563F03D5}" dt="2026-03-06T14:06:42.414" v="175"/>
-          <ac:spMkLst>
-            <pc:docMk/>
-            <pc:sldMk cId="3026472643" sldId="267"/>
-            <ac:spMk id="3" creationId="{6F51B530-3EAC-A8AF-BB37-1AE63B5122B9}"/>
-          </ac:spMkLst>
-        </pc:spChg>
         <pc:spChg chg="mod">
           <ac:chgData name="Aiswarya Lakshmi Moravaneni" userId="8bd20491d4af265d" providerId="LiveId" clId="{39E3F066-C97A-400C-9E37-AF9E563F03D5}" dt="2026-03-06T14:49:03.317" v="559" actId="14100"/>
           <ac:spMkLst>
@@ -655,28 +469,12 @@
             <ac:spMk id="4" creationId="{48389EED-8ECC-FE54-BEEA-A0779F8AD670}"/>
           </ac:spMkLst>
         </pc:spChg>
-        <pc:spChg chg="add del mod">
-          <ac:chgData name="Aiswarya Lakshmi Moravaneni" userId="8bd20491d4af265d" providerId="LiveId" clId="{39E3F066-C97A-400C-9E37-AF9E563F03D5}" dt="2026-03-06T14:07:14.582" v="181" actId="21"/>
-          <ac:spMkLst>
-            <pc:docMk/>
-            <pc:sldMk cId="3026472643" sldId="267"/>
-            <ac:spMk id="8" creationId="{4853ECC3-7869-DCF8-4436-41162D9BEC48}"/>
-          </ac:spMkLst>
-        </pc:spChg>
         <pc:picChg chg="add mod">
           <ac:chgData name="Aiswarya Lakshmi Moravaneni" userId="8bd20491d4af265d" providerId="LiveId" clId="{39E3F066-C97A-400C-9E37-AF9E563F03D5}" dt="2026-03-06T14:07:25.399" v="183" actId="1076"/>
           <ac:picMkLst>
             <pc:docMk/>
             <pc:sldMk cId="3026472643" sldId="267"/>
             <ac:picMk id="5" creationId="{EF9983F3-C8E4-2217-8882-DA4B9C0BE96D}"/>
-          </ac:picMkLst>
-        </pc:picChg>
-        <pc:picChg chg="del">
-          <ac:chgData name="Aiswarya Lakshmi Moravaneni" userId="8bd20491d4af265d" providerId="LiveId" clId="{39E3F066-C97A-400C-9E37-AF9E563F03D5}" dt="2026-03-06T14:06:58.861" v="178" actId="21"/>
-          <ac:picMkLst>
-            <pc:docMk/>
-            <pc:sldMk cId="3026472643" sldId="267"/>
-            <ac:picMk id="6" creationId="{4F92EB3A-B121-978A-09B7-940402035AC4}"/>
           </ac:picMkLst>
         </pc:picChg>
       </pc:sldChg>
@@ -702,14 +500,6 @@
             <ac:spMk id="4" creationId="{344AAB7B-9CA8-8664-0BFF-718F5B45CFC8}"/>
           </ac:spMkLst>
         </pc:spChg>
-        <pc:spChg chg="add del mod">
-          <ac:chgData name="Aiswarya Lakshmi Moravaneni" userId="8bd20491d4af265d" providerId="LiveId" clId="{39E3F066-C97A-400C-9E37-AF9E563F03D5}" dt="2026-03-06T14:08:23.377" v="187" actId="21"/>
-          <ac:spMkLst>
-            <pc:docMk/>
-            <pc:sldMk cId="1204831464" sldId="268"/>
-            <ac:spMk id="7" creationId="{506E7B9A-3304-0A93-E9A3-32ACD82424AC}"/>
-          </ac:spMkLst>
-        </pc:spChg>
         <pc:picChg chg="add mod">
           <ac:chgData name="Aiswarya Lakshmi Moravaneni" userId="8bd20491d4af265d" providerId="LiveId" clId="{39E3F066-C97A-400C-9E37-AF9E563F03D5}" dt="2026-03-06T14:08:27.680" v="188" actId="1076"/>
           <ac:picMkLst>
@@ -718,48 +508,9 @@
             <ac:picMk id="3" creationId="{7380DD75-4A98-1132-8BE0-573F86EB9899}"/>
           </ac:picMkLst>
         </pc:picChg>
-        <pc:picChg chg="del">
-          <ac:chgData name="Aiswarya Lakshmi Moravaneni" userId="8bd20491d4af265d" providerId="LiveId" clId="{39E3F066-C97A-400C-9E37-AF9E563F03D5}" dt="2026-03-06T14:08:19.839" v="186" actId="21"/>
-          <ac:picMkLst>
-            <pc:docMk/>
-            <pc:sldMk cId="1204831464" sldId="268"/>
-            <ac:picMk id="6" creationId="{9C280B8B-7476-1B2C-5854-F38029B6FAC4}"/>
-          </ac:picMkLst>
-        </pc:picChg>
-      </pc:sldChg>
-      <pc:sldChg chg="addSp delSp modSp new del mod">
-        <pc:chgData name="Aiswarya Lakshmi Moravaneni" userId="8bd20491d4af265d" providerId="LiveId" clId="{39E3F066-C97A-400C-9E37-AF9E563F03D5}" dt="2026-03-06T14:18:53.787" v="268" actId="2696"/>
-        <pc:sldMkLst>
-          <pc:docMk/>
-          <pc:sldMk cId="758292607" sldId="269"/>
-        </pc:sldMkLst>
-        <pc:spChg chg="mod">
-          <ac:chgData name="Aiswarya Lakshmi Moravaneni" userId="8bd20491d4af265d" providerId="LiveId" clId="{39E3F066-C97A-400C-9E37-AF9E563F03D5}" dt="2026-03-06T14:18:02.759" v="263" actId="122"/>
-          <ac:spMkLst>
-            <pc:docMk/>
-            <pc:sldMk cId="758292607" sldId="269"/>
-            <ac:spMk id="2" creationId="{FE5D7412-DDB4-E5F8-D938-837D36B75C5B}"/>
-          </ac:spMkLst>
-        </pc:spChg>
-        <pc:spChg chg="del mod">
-          <ac:chgData name="Aiswarya Lakshmi Moravaneni" userId="8bd20491d4af265d" providerId="LiveId" clId="{39E3F066-C97A-400C-9E37-AF9E563F03D5}" dt="2026-03-06T14:18:35.439" v="267"/>
-          <ac:spMkLst>
-            <pc:docMk/>
-            <pc:sldMk cId="758292607" sldId="269"/>
-            <ac:spMk id="3" creationId="{7D73DACC-4FF0-F8B0-4387-68DD0A8544B3}"/>
-          </ac:spMkLst>
-        </pc:spChg>
-        <pc:spChg chg="add mod">
-          <ac:chgData name="Aiswarya Lakshmi Moravaneni" userId="8bd20491d4af265d" providerId="LiveId" clId="{39E3F066-C97A-400C-9E37-AF9E563F03D5}" dt="2026-03-06T14:18:35.439" v="267"/>
-          <ac:spMkLst>
-            <pc:docMk/>
-            <pc:sldMk cId="758292607" sldId="269"/>
-            <ac:spMk id="4" creationId="{A5ADB8BD-0272-72EF-EED5-B10976C15254}"/>
-          </ac:spMkLst>
-        </pc:spChg>
       </pc:sldChg>
       <pc:sldChg chg="addSp delSp modSp new mod">
-        <pc:chgData name="Aiswarya Lakshmi Moravaneni" userId="8bd20491d4af265d" providerId="LiveId" clId="{39E3F066-C97A-400C-9E37-AF9E563F03D5}" dt="2026-03-06T14:44:15.520" v="514" actId="27636"/>
+        <pc:chgData name="Aiswarya Lakshmi Moravaneni" userId="8bd20491d4af265d" providerId="LiveId" clId="{39E3F066-C97A-400C-9E37-AF9E563F03D5}" dt="2026-03-16T13:56:43.263" v="704" actId="20577"/>
         <pc:sldMkLst>
           <pc:docMk/>
           <pc:sldMk cId="3000907245" sldId="269"/>
@@ -773,7 +524,7 @@
           </ac:spMkLst>
         </pc:spChg>
         <pc:spChg chg="mod">
-          <ac:chgData name="Aiswarya Lakshmi Moravaneni" userId="8bd20491d4af265d" providerId="LiveId" clId="{39E3F066-C97A-400C-9E37-AF9E563F03D5}" dt="2026-03-06T14:44:15.520" v="514" actId="27636"/>
+          <ac:chgData name="Aiswarya Lakshmi Moravaneni" userId="8bd20491d4af265d" providerId="LiveId" clId="{39E3F066-C97A-400C-9E37-AF9E563F03D5}" dt="2026-03-16T13:47:52.269" v="687" actId="5793"/>
           <ac:spMkLst>
             <pc:docMk/>
             <pc:sldMk cId="3000907245" sldId="269"/>
@@ -781,55 +532,15 @@
           </ac:spMkLst>
         </pc:spChg>
         <pc:spChg chg="mod">
-          <ac:chgData name="Aiswarya Lakshmi Moravaneni" userId="8bd20491d4af265d" providerId="LiveId" clId="{39E3F066-C97A-400C-9E37-AF9E563F03D5}" dt="2026-03-06T14:44:15.519" v="513" actId="27636"/>
+          <ac:chgData name="Aiswarya Lakshmi Moravaneni" userId="8bd20491d4af265d" providerId="LiveId" clId="{39E3F066-C97A-400C-9E37-AF9E563F03D5}" dt="2026-03-16T13:44:49.646" v="639" actId="27636"/>
           <ac:spMkLst>
             <pc:docMk/>
             <pc:sldMk cId="3000907245" sldId="269"/>
             <ac:spMk id="4" creationId="{8D5EF116-59B6-DF15-FEB6-88A209B1BC09}"/>
           </ac:spMkLst>
         </pc:spChg>
-        <pc:spChg chg="add">
-          <ac:chgData name="Aiswarya Lakshmi Moravaneni" userId="8bd20491d4af265d" providerId="LiveId" clId="{39E3F066-C97A-400C-9E37-AF9E563F03D5}" dt="2026-03-06T14:22:16.688" v="324"/>
-          <ac:spMkLst>
-            <pc:docMk/>
-            <pc:sldMk cId="3000907245" sldId="269"/>
-            <ac:spMk id="5" creationId="{E734631F-27BD-1943-C071-53CB19DBA7AE}"/>
-          </ac:spMkLst>
-        </pc:spChg>
-        <pc:spChg chg="add">
-          <ac:chgData name="Aiswarya Lakshmi Moravaneni" userId="8bd20491d4af265d" providerId="LiveId" clId="{39E3F066-C97A-400C-9E37-AF9E563F03D5}" dt="2026-03-06T14:22:22.114" v="325"/>
-          <ac:spMkLst>
-            <pc:docMk/>
-            <pc:sldMk cId="3000907245" sldId="269"/>
-            <ac:spMk id="6" creationId="{E313EF13-3B4F-756C-5098-B99C607508A1}"/>
-          </ac:spMkLst>
-        </pc:spChg>
-        <pc:spChg chg="add">
-          <ac:chgData name="Aiswarya Lakshmi Moravaneni" userId="8bd20491d4af265d" providerId="LiveId" clId="{39E3F066-C97A-400C-9E37-AF9E563F03D5}" dt="2026-03-06T14:22:27.726" v="326"/>
-          <ac:spMkLst>
-            <pc:docMk/>
-            <pc:sldMk cId="3000907245" sldId="269"/>
-            <ac:spMk id="7" creationId="{31598D5B-8C8E-C0AD-21CA-07361EDCB5D5}"/>
-          </ac:spMkLst>
-        </pc:spChg>
-        <pc:spChg chg="add">
-          <ac:chgData name="Aiswarya Lakshmi Moravaneni" userId="8bd20491d4af265d" providerId="LiveId" clId="{39E3F066-C97A-400C-9E37-AF9E563F03D5}" dt="2026-03-06T14:22:34.232" v="327"/>
-          <ac:spMkLst>
-            <pc:docMk/>
-            <pc:sldMk cId="3000907245" sldId="269"/>
-            <ac:spMk id="8" creationId="{7FB0CA40-D183-B622-D5F4-3D935C464C36}"/>
-          </ac:spMkLst>
-        </pc:spChg>
-        <pc:spChg chg="add del mod">
-          <ac:chgData name="Aiswarya Lakshmi Moravaneni" userId="8bd20491d4af265d" providerId="LiveId" clId="{39E3F066-C97A-400C-9E37-AF9E563F03D5}" dt="2026-03-06T14:22:59.477" v="330" actId="21"/>
-          <ac:spMkLst>
-            <pc:docMk/>
-            <pc:sldMk cId="3000907245" sldId="269"/>
-            <ac:spMk id="9" creationId="{E3DC5E65-7AAA-D307-F847-DE79E00B1381}"/>
-          </ac:spMkLst>
-        </pc:spChg>
         <pc:spChg chg="add mod">
-          <ac:chgData name="Aiswarya Lakshmi Moravaneni" userId="8bd20491d4af265d" providerId="LiveId" clId="{39E3F066-C97A-400C-9E37-AF9E563F03D5}" dt="2026-03-06T14:24:26.086" v="346" actId="14100"/>
+          <ac:chgData name="Aiswarya Lakshmi Moravaneni" userId="8bd20491d4af265d" providerId="LiveId" clId="{39E3F066-C97A-400C-9E37-AF9E563F03D5}" dt="2026-03-16T13:56:43.263" v="704" actId="20577"/>
           <ac:spMkLst>
             <pc:docMk/>
             <pc:sldMk cId="3000907245" sldId="269"/>
@@ -837,15 +548,8 @@
           </ac:spMkLst>
         </pc:spChg>
       </pc:sldChg>
-      <pc:sldChg chg="add del">
-        <pc:chgData name="Aiswarya Lakshmi Moravaneni" userId="8bd20491d4af265d" providerId="LiveId" clId="{39E3F066-C97A-400C-9E37-AF9E563F03D5}" dt="2026-03-06T14:19:44.355" v="271"/>
-        <pc:sldMkLst>
-          <pc:docMk/>
-          <pc:sldMk cId="392627615" sldId="270"/>
-        </pc:sldMkLst>
-      </pc:sldChg>
       <pc:sldChg chg="addSp modSp new mod">
-        <pc:chgData name="Aiswarya Lakshmi Moravaneni" userId="8bd20491d4af265d" providerId="LiveId" clId="{39E3F066-C97A-400C-9E37-AF9E563F03D5}" dt="2026-03-06T14:32:30.344" v="467" actId="207"/>
+        <pc:chgData name="Aiswarya Lakshmi Moravaneni" userId="8bd20491d4af265d" providerId="LiveId" clId="{39E3F066-C97A-400C-9E37-AF9E563F03D5}" dt="2026-03-16T13:46:26.410" v="653" actId="27636"/>
         <pc:sldMkLst>
           <pc:docMk/>
           <pc:sldMk cId="1275611348" sldId="270"/>
@@ -859,7 +563,7 @@
           </ac:spMkLst>
         </pc:spChg>
         <pc:spChg chg="mod">
-          <ac:chgData name="Aiswarya Lakshmi Moravaneni" userId="8bd20491d4af265d" providerId="LiveId" clId="{39E3F066-C97A-400C-9E37-AF9E563F03D5}" dt="2026-03-06T14:26:04.640" v="357" actId="14100"/>
+          <ac:chgData name="Aiswarya Lakshmi Moravaneni" userId="8bd20491d4af265d" providerId="LiveId" clId="{39E3F066-C97A-400C-9E37-AF9E563F03D5}" dt="2026-03-16T13:46:26.410" v="653" actId="27636"/>
           <ac:spMkLst>
             <pc:docMk/>
             <pc:sldMk cId="1275611348" sldId="270"/>
@@ -874,18 +578,444 @@
             <ac:spMk id="5" creationId="{ACD2441C-9AD8-9060-E62B-EA60947A84C3}"/>
           </ac:spMkLst>
         </pc:spChg>
-        <pc:picChg chg="add mod">
-          <ac:chgData name="Aiswarya Lakshmi Moravaneni" userId="8bd20491d4af265d" providerId="LiveId" clId="{39E3F066-C97A-400C-9E37-AF9E563F03D5}" dt="2026-03-06T14:31:47.713" v="455" actId="1076"/>
-          <ac:picMkLst>
-            <pc:docMk/>
-            <pc:sldMk cId="1275611348" sldId="270"/>
-            <ac:picMk id="4" creationId="{A242BF37-D754-53C4-6647-72B6371863E2}"/>
-          </ac:picMkLst>
-        </pc:picChg>
       </pc:sldChg>
     </pc:docChg>
   </pc:docChgLst>
 </pc:chgInfo>
+</file>
+
+<file path=ppt/notesMasters/notesMaster1.xml><?xml version="1.0" encoding="utf-8"?>
+<p:notesMaster xmlns:a="http://schemas.openxmlformats.org/drawingml/2006/main" xmlns:r="http://schemas.openxmlformats.org/officeDocument/2006/relationships" xmlns:p="http://schemas.openxmlformats.org/presentationml/2006/main">
+  <p:cSld>
+    <p:bg>
+      <p:bgRef idx="1001">
+        <a:schemeClr val="bg1"/>
+      </p:bgRef>
+    </p:bg>
+    <p:spTree>
+      <p:nvGrpSpPr>
+        <p:cNvPr id="1" name=""/>
+        <p:cNvGrpSpPr/>
+        <p:nvPr/>
+      </p:nvGrpSpPr>
+      <p:grpSpPr>
+        <a:xfrm>
+          <a:off x="0" y="0"/>
+          <a:ext cx="0" cy="0"/>
+          <a:chOff x="0" y="0"/>
+          <a:chExt cx="0" cy="0"/>
+        </a:xfrm>
+      </p:grpSpPr>
+      <p:sp>
+        <p:nvSpPr>
+          <p:cNvPr id="2" name="Header Placeholder 1"/>
+          <p:cNvSpPr>
+            <a:spLocks noGrp="1"/>
+          </p:cNvSpPr>
+          <p:nvPr>
+            <p:ph type="hdr" sz="quarter"/>
+          </p:nvPr>
+        </p:nvSpPr>
+        <p:spPr>
+          <a:xfrm>
+            <a:off x="0" y="0"/>
+            <a:ext cx="2971800" cy="458788"/>
+          </a:xfrm>
+          <a:prstGeom prst="rect">
+            <a:avLst/>
+          </a:prstGeom>
+        </p:spPr>
+        <p:txBody>
+          <a:bodyPr vert="horz" lIns="91440" tIns="45720" rIns="91440" bIns="45720" rtlCol="0"/>
+          <a:lstStyle>
+            <a:lvl1pPr algn="l">
+              <a:defRPr sz="1200"/>
+            </a:lvl1pPr>
+          </a:lstStyle>
+          <a:p>
+            <a:endParaRPr lang="en-IN"/>
+          </a:p>
+        </p:txBody>
+      </p:sp>
+      <p:sp>
+        <p:nvSpPr>
+          <p:cNvPr id="3" name="Date Placeholder 2"/>
+          <p:cNvSpPr>
+            <a:spLocks noGrp="1"/>
+          </p:cNvSpPr>
+          <p:nvPr>
+            <p:ph type="dt" idx="1"/>
+          </p:nvPr>
+        </p:nvSpPr>
+        <p:spPr>
+          <a:xfrm>
+            <a:off x="3884613" y="0"/>
+            <a:ext cx="2971800" cy="458788"/>
+          </a:xfrm>
+          <a:prstGeom prst="rect">
+            <a:avLst/>
+          </a:prstGeom>
+        </p:spPr>
+        <p:txBody>
+          <a:bodyPr vert="horz" lIns="91440" tIns="45720" rIns="91440" bIns="45720" rtlCol="0"/>
+          <a:lstStyle>
+            <a:lvl1pPr algn="r">
+              <a:defRPr sz="1200"/>
+            </a:lvl1pPr>
+          </a:lstStyle>
+          <a:p>
+            <a:fld id="{ED493DAE-1B11-4C0D-877B-6AA0F4634F0B}" type="datetimeFigureOut">
+              <a:rPr lang="en-IN" smtClean="0"/>
+              <a:t>16-03-2026</a:t>
+            </a:fld>
+            <a:endParaRPr lang="en-IN"/>
+          </a:p>
+        </p:txBody>
+      </p:sp>
+      <p:sp>
+        <p:nvSpPr>
+          <p:cNvPr id="4" name="Slide Image Placeholder 3"/>
+          <p:cNvSpPr>
+            <a:spLocks noGrp="1" noRot="1" noChangeAspect="1"/>
+          </p:cNvSpPr>
+          <p:nvPr>
+            <p:ph type="sldImg" idx="2"/>
+          </p:nvPr>
+        </p:nvSpPr>
+        <p:spPr>
+          <a:xfrm>
+            <a:off x="685800" y="1143000"/>
+            <a:ext cx="5486400" cy="3086100"/>
+          </a:xfrm>
+          <a:prstGeom prst="rect">
+            <a:avLst/>
+          </a:prstGeom>
+          <a:noFill/>
+          <a:ln w="12700">
+            <a:solidFill>
+              <a:prstClr val="black"/>
+            </a:solidFill>
+          </a:ln>
+        </p:spPr>
+        <p:txBody>
+          <a:bodyPr vert="horz" lIns="91440" tIns="45720" rIns="91440" bIns="45720" rtlCol="0" anchor="ctr"/>
+          <a:lstStyle/>
+          <a:p>
+            <a:endParaRPr lang="en-IN"/>
+          </a:p>
+        </p:txBody>
+      </p:sp>
+      <p:sp>
+        <p:nvSpPr>
+          <p:cNvPr id="5" name="Notes Placeholder 4"/>
+          <p:cNvSpPr>
+            <a:spLocks noGrp="1"/>
+          </p:cNvSpPr>
+          <p:nvPr>
+            <p:ph type="body" sz="quarter" idx="3"/>
+          </p:nvPr>
+        </p:nvSpPr>
+        <p:spPr>
+          <a:xfrm>
+            <a:off x="685800" y="4400550"/>
+            <a:ext cx="5486400" cy="3600450"/>
+          </a:xfrm>
+          <a:prstGeom prst="rect">
+            <a:avLst/>
+          </a:prstGeom>
+        </p:spPr>
+        <p:txBody>
+          <a:bodyPr vert="horz" lIns="91440" tIns="45720" rIns="91440" bIns="45720" rtlCol="0"/>
+          <a:lstStyle/>
+          <a:p>
+            <a:pPr lvl="0"/>
+            <a:r>
+              <a:rPr lang="en-US"/>
+              <a:t>Click to edit Master text styles</a:t>
+            </a:r>
+          </a:p>
+          <a:p>
+            <a:pPr lvl="1"/>
+            <a:r>
+              <a:rPr lang="en-US"/>
+              <a:t>Second level</a:t>
+            </a:r>
+          </a:p>
+          <a:p>
+            <a:pPr lvl="2"/>
+            <a:r>
+              <a:rPr lang="en-US"/>
+              <a:t>Third level</a:t>
+            </a:r>
+          </a:p>
+          <a:p>
+            <a:pPr lvl="3"/>
+            <a:r>
+              <a:rPr lang="en-US"/>
+              <a:t>Fourth level</a:t>
+            </a:r>
+          </a:p>
+          <a:p>
+            <a:pPr lvl="4"/>
+            <a:r>
+              <a:rPr lang="en-US"/>
+              <a:t>Fifth level</a:t>
+            </a:r>
+            <a:endParaRPr lang="en-IN"/>
+          </a:p>
+        </p:txBody>
+      </p:sp>
+      <p:sp>
+        <p:nvSpPr>
+          <p:cNvPr id="6" name="Footer Placeholder 5"/>
+          <p:cNvSpPr>
+            <a:spLocks noGrp="1"/>
+          </p:cNvSpPr>
+          <p:nvPr>
+            <p:ph type="ftr" sz="quarter" idx="4"/>
+          </p:nvPr>
+        </p:nvSpPr>
+        <p:spPr>
+          <a:xfrm>
+            <a:off x="0" y="8685213"/>
+            <a:ext cx="2971800" cy="458787"/>
+          </a:xfrm>
+          <a:prstGeom prst="rect">
+            <a:avLst/>
+          </a:prstGeom>
+        </p:spPr>
+        <p:txBody>
+          <a:bodyPr vert="horz" lIns="91440" tIns="45720" rIns="91440" bIns="45720" rtlCol="0" anchor="b"/>
+          <a:lstStyle>
+            <a:lvl1pPr algn="l">
+              <a:defRPr sz="1200"/>
+            </a:lvl1pPr>
+          </a:lstStyle>
+          <a:p>
+            <a:endParaRPr lang="en-IN"/>
+          </a:p>
+        </p:txBody>
+      </p:sp>
+      <p:sp>
+        <p:nvSpPr>
+          <p:cNvPr id="7" name="Slide Number Placeholder 6"/>
+          <p:cNvSpPr>
+            <a:spLocks noGrp="1"/>
+          </p:cNvSpPr>
+          <p:nvPr>
+            <p:ph type="sldNum" sz="quarter" idx="5"/>
+          </p:nvPr>
+        </p:nvSpPr>
+        <p:spPr>
+          <a:xfrm>
+            <a:off x="3884613" y="8685213"/>
+            <a:ext cx="2971800" cy="458787"/>
+          </a:xfrm>
+          <a:prstGeom prst="rect">
+            <a:avLst/>
+          </a:prstGeom>
+        </p:spPr>
+        <p:txBody>
+          <a:bodyPr vert="horz" lIns="91440" tIns="45720" rIns="91440" bIns="45720" rtlCol="0" anchor="b"/>
+          <a:lstStyle>
+            <a:lvl1pPr algn="r">
+              <a:defRPr sz="1200"/>
+            </a:lvl1pPr>
+          </a:lstStyle>
+          <a:p>
+            <a:fld id="{2DA7B4BE-E480-4FD1-AB6B-A1D172507FF7}" type="slidenum">
+              <a:rPr lang="en-IN" smtClean="0"/>
+              <a:t>‹#›</a:t>
+            </a:fld>
+            <a:endParaRPr lang="en-IN"/>
+          </a:p>
+        </p:txBody>
+      </p:sp>
+    </p:spTree>
+    <p:extLst>
+      <p:ext uri="{BB962C8B-B14F-4D97-AF65-F5344CB8AC3E}">
+        <p14:creationId xmlns:p14="http://schemas.microsoft.com/office/powerpoint/2010/main" val="2454477459"/>
+      </p:ext>
+    </p:extLst>
+  </p:cSld>
+  <p:clrMap bg1="lt1" tx1="dk1" bg2="lt2" tx2="dk2" accent1="accent1" accent2="accent2" accent3="accent3" accent4="accent4" accent5="accent5" accent6="accent6" hlink="hlink" folHlink="folHlink"/>
+  <p:notesStyle>
+    <a:lvl1pPr marL="0" algn="l" defTabSz="914400" rtl="0" eaLnBrk="1" latinLnBrk="0" hangingPunct="1">
+      <a:defRPr sz="1200" kern="1200">
+        <a:solidFill>
+          <a:schemeClr val="tx1"/>
+        </a:solidFill>
+        <a:latin typeface="+mn-lt"/>
+        <a:ea typeface="+mn-ea"/>
+        <a:cs typeface="+mn-cs"/>
+      </a:defRPr>
+    </a:lvl1pPr>
+    <a:lvl2pPr marL="457200" algn="l" defTabSz="914400" rtl="0" eaLnBrk="1" latinLnBrk="0" hangingPunct="1">
+      <a:defRPr sz="1200" kern="1200">
+        <a:solidFill>
+          <a:schemeClr val="tx1"/>
+        </a:solidFill>
+        <a:latin typeface="+mn-lt"/>
+        <a:ea typeface="+mn-ea"/>
+        <a:cs typeface="+mn-cs"/>
+      </a:defRPr>
+    </a:lvl2pPr>
+    <a:lvl3pPr marL="914400" algn="l" defTabSz="914400" rtl="0" eaLnBrk="1" latinLnBrk="0" hangingPunct="1">
+      <a:defRPr sz="1200" kern="1200">
+        <a:solidFill>
+          <a:schemeClr val="tx1"/>
+        </a:solidFill>
+        <a:latin typeface="+mn-lt"/>
+        <a:ea typeface="+mn-ea"/>
+        <a:cs typeface="+mn-cs"/>
+      </a:defRPr>
+    </a:lvl3pPr>
+    <a:lvl4pPr marL="1371600" algn="l" defTabSz="914400" rtl="0" eaLnBrk="1" latinLnBrk="0" hangingPunct="1">
+      <a:defRPr sz="1200" kern="1200">
+        <a:solidFill>
+          <a:schemeClr val="tx1"/>
+        </a:solidFill>
+        <a:latin typeface="+mn-lt"/>
+        <a:ea typeface="+mn-ea"/>
+        <a:cs typeface="+mn-cs"/>
+      </a:defRPr>
+    </a:lvl4pPr>
+    <a:lvl5pPr marL="1828800" algn="l" defTabSz="914400" rtl="0" eaLnBrk="1" latinLnBrk="0" hangingPunct="1">
+      <a:defRPr sz="1200" kern="1200">
+        <a:solidFill>
+          <a:schemeClr val="tx1"/>
+        </a:solidFill>
+        <a:latin typeface="+mn-lt"/>
+        <a:ea typeface="+mn-ea"/>
+        <a:cs typeface="+mn-cs"/>
+      </a:defRPr>
+    </a:lvl5pPr>
+    <a:lvl6pPr marL="2286000" algn="l" defTabSz="914400" rtl="0" eaLnBrk="1" latinLnBrk="0" hangingPunct="1">
+      <a:defRPr sz="1200" kern="1200">
+        <a:solidFill>
+          <a:schemeClr val="tx1"/>
+        </a:solidFill>
+        <a:latin typeface="+mn-lt"/>
+        <a:ea typeface="+mn-ea"/>
+        <a:cs typeface="+mn-cs"/>
+      </a:defRPr>
+    </a:lvl6pPr>
+    <a:lvl7pPr marL="2743200" algn="l" defTabSz="914400" rtl="0" eaLnBrk="1" latinLnBrk="0" hangingPunct="1">
+      <a:defRPr sz="1200" kern="1200">
+        <a:solidFill>
+          <a:schemeClr val="tx1"/>
+        </a:solidFill>
+        <a:latin typeface="+mn-lt"/>
+        <a:ea typeface="+mn-ea"/>
+        <a:cs typeface="+mn-cs"/>
+      </a:defRPr>
+    </a:lvl7pPr>
+    <a:lvl8pPr marL="3200400" algn="l" defTabSz="914400" rtl="0" eaLnBrk="1" latinLnBrk="0" hangingPunct="1">
+      <a:defRPr sz="1200" kern="1200">
+        <a:solidFill>
+          <a:schemeClr val="tx1"/>
+        </a:solidFill>
+        <a:latin typeface="+mn-lt"/>
+        <a:ea typeface="+mn-ea"/>
+        <a:cs typeface="+mn-cs"/>
+      </a:defRPr>
+    </a:lvl8pPr>
+    <a:lvl9pPr marL="3657600" algn="l" defTabSz="914400" rtl="0" eaLnBrk="1" latinLnBrk="0" hangingPunct="1">
+      <a:defRPr sz="1200" kern="1200">
+        <a:solidFill>
+          <a:schemeClr val="tx1"/>
+        </a:solidFill>
+        <a:latin typeface="+mn-lt"/>
+        <a:ea typeface="+mn-ea"/>
+        <a:cs typeface="+mn-cs"/>
+      </a:defRPr>
+    </a:lvl9pPr>
+  </p:notesStyle>
+</p:notesMaster>
+</file>
+
+<file path=ppt/notesSlides/notesSlide1.xml><?xml version="1.0" encoding="utf-8"?>
+<p:notes xmlns:a="http://schemas.openxmlformats.org/drawingml/2006/main" xmlns:r="http://schemas.openxmlformats.org/officeDocument/2006/relationships" xmlns:p="http://schemas.openxmlformats.org/presentationml/2006/main">
+  <p:cSld>
+    <p:spTree>
+      <p:nvGrpSpPr>
+        <p:cNvPr id="1" name=""/>
+        <p:cNvGrpSpPr/>
+        <p:nvPr/>
+      </p:nvGrpSpPr>
+      <p:grpSpPr>
+        <a:xfrm>
+          <a:off x="0" y="0"/>
+          <a:ext cx="0" cy="0"/>
+          <a:chOff x="0" y="0"/>
+          <a:chExt cx="0" cy="0"/>
+        </a:xfrm>
+      </p:grpSpPr>
+      <p:sp>
+        <p:nvSpPr>
+          <p:cNvPr id="2" name="Slide Image Placeholder 1"/>
+          <p:cNvSpPr>
+            <a:spLocks noGrp="1" noRot="1" noChangeAspect="1"/>
+          </p:cNvSpPr>
+          <p:nvPr>
+            <p:ph type="sldImg"/>
+          </p:nvPr>
+        </p:nvSpPr>
+        <p:spPr/>
+      </p:sp>
+      <p:sp>
+        <p:nvSpPr>
+          <p:cNvPr id="3" name="Notes Placeholder 2"/>
+          <p:cNvSpPr>
+            <a:spLocks noGrp="1"/>
+          </p:cNvSpPr>
+          <p:nvPr>
+            <p:ph type="body" idx="1"/>
+          </p:nvPr>
+        </p:nvSpPr>
+        <p:spPr/>
+        <p:txBody>
+          <a:bodyPr/>
+          <a:lstStyle/>
+          <a:p>
+            <a:endParaRPr lang="en-IN" dirty="0"/>
+          </a:p>
+        </p:txBody>
+      </p:sp>
+      <p:sp>
+        <p:nvSpPr>
+          <p:cNvPr id="4" name="Slide Number Placeholder 3"/>
+          <p:cNvSpPr>
+            <a:spLocks noGrp="1"/>
+          </p:cNvSpPr>
+          <p:nvPr>
+            <p:ph type="sldNum" sz="quarter" idx="5"/>
+          </p:nvPr>
+        </p:nvSpPr>
+        <p:spPr/>
+        <p:txBody>
+          <a:bodyPr/>
+          <a:lstStyle/>
+          <a:p>
+            <a:fld id="{2DA7B4BE-E480-4FD1-AB6B-A1D172507FF7}" type="slidenum">
+              <a:rPr lang="en-IN" smtClean="0"/>
+              <a:t>3</a:t>
+            </a:fld>
+            <a:endParaRPr lang="en-IN"/>
+          </a:p>
+        </p:txBody>
+      </p:sp>
+    </p:spTree>
+    <p:extLst>
+      <p:ext uri="{BB962C8B-B14F-4D97-AF65-F5344CB8AC3E}">
+        <p14:creationId xmlns:p14="http://schemas.microsoft.com/office/powerpoint/2010/main" val="582219444"/>
+      </p:ext>
+    </p:extLst>
+  </p:cSld>
+  <p:clrMapOvr>
+    <a:masterClrMapping/>
+  </p:clrMapOvr>
+</p:notes>
 </file>
 
 <file path=ppt/slideLayouts/slideLayout1.xml><?xml version="1.0" encoding="utf-8"?>
@@ -1084,7 +1214,7 @@
           <a:p>
             <a:fld id="{CA0247F9-9AC2-4703-888C-937014C7865D}" type="datetimeFigureOut">
               <a:rPr lang="en-IN" smtClean="0"/>
-              <a:t>06-03-2026</a:t>
+              <a:t>16-03-2026</a:t>
             </a:fld>
             <a:endParaRPr lang="en-IN"/>
           </a:p>
@@ -1365,7 +1495,7 @@
           <a:p>
             <a:fld id="{CA0247F9-9AC2-4703-888C-937014C7865D}" type="datetimeFigureOut">
               <a:rPr lang="en-IN" smtClean="0"/>
-              <a:t>06-03-2026</a:t>
+              <a:t>16-03-2026</a:t>
             </a:fld>
             <a:endParaRPr lang="en-IN"/>
           </a:p>
@@ -1557,7 +1687,7 @@
           <a:p>
             <a:fld id="{CA0247F9-9AC2-4703-888C-937014C7865D}" type="datetimeFigureOut">
               <a:rPr lang="en-IN" smtClean="0"/>
-              <a:t>06-03-2026</a:t>
+              <a:t>16-03-2026</a:t>
             </a:fld>
             <a:endParaRPr lang="en-IN"/>
           </a:p>
@@ -1818,7 +1948,7 @@
           <a:p>
             <a:fld id="{CA0247F9-9AC2-4703-888C-937014C7865D}" type="datetimeFigureOut">
               <a:rPr lang="en-IN" smtClean="0"/>
-              <a:t>06-03-2026</a:t>
+              <a:t>16-03-2026</a:t>
             </a:fld>
             <a:endParaRPr lang="en-IN"/>
           </a:p>
@@ -2244,7 +2374,7 @@
           <a:p>
             <a:fld id="{CA0247F9-9AC2-4703-888C-937014C7865D}" type="datetimeFigureOut">
               <a:rPr lang="en-IN" smtClean="0"/>
-              <a:t>06-03-2026</a:t>
+              <a:t>16-03-2026</a:t>
             </a:fld>
             <a:endParaRPr lang="en-IN"/>
           </a:p>
@@ -2790,7 +2920,7 @@
           <a:p>
             <a:fld id="{CA0247F9-9AC2-4703-888C-937014C7865D}" type="datetimeFigureOut">
               <a:rPr lang="en-IN" smtClean="0"/>
-              <a:t>06-03-2026</a:t>
+              <a:t>16-03-2026</a:t>
             </a:fld>
             <a:endParaRPr lang="en-IN"/>
           </a:p>
@@ -3621,7 +3751,7 @@
           <a:p>
             <a:fld id="{CA0247F9-9AC2-4703-888C-937014C7865D}" type="datetimeFigureOut">
               <a:rPr lang="en-IN" smtClean="0"/>
-              <a:t>06-03-2026</a:t>
+              <a:t>16-03-2026</a:t>
             </a:fld>
             <a:endParaRPr lang="en-IN"/>
           </a:p>
@@ -3791,7 +3921,7 @@
           <a:p>
             <a:fld id="{CA0247F9-9AC2-4703-888C-937014C7865D}" type="datetimeFigureOut">
               <a:rPr lang="en-IN" smtClean="0"/>
-              <a:t>06-03-2026</a:t>
+              <a:t>16-03-2026</a:t>
             </a:fld>
             <a:endParaRPr lang="en-IN"/>
           </a:p>
@@ -3971,7 +4101,7 @@
           <a:p>
             <a:fld id="{CA0247F9-9AC2-4703-888C-937014C7865D}" type="datetimeFigureOut">
               <a:rPr lang="en-IN" smtClean="0"/>
-              <a:t>06-03-2026</a:t>
+              <a:t>16-03-2026</a:t>
             </a:fld>
             <a:endParaRPr lang="en-IN"/>
           </a:p>
@@ -4141,7 +4271,7 @@
           <a:p>
             <a:fld id="{CA0247F9-9AC2-4703-888C-937014C7865D}" type="datetimeFigureOut">
               <a:rPr lang="en-IN" smtClean="0"/>
-              <a:t>06-03-2026</a:t>
+              <a:t>16-03-2026</a:t>
             </a:fld>
             <a:endParaRPr lang="en-IN"/>
           </a:p>
@@ -4398,7 +4528,7 @@
           <a:p>
             <a:fld id="{CA0247F9-9AC2-4703-888C-937014C7865D}" type="datetimeFigureOut">
               <a:rPr lang="en-IN" smtClean="0"/>
-              <a:t>06-03-2026</a:t>
+              <a:t>16-03-2026</a:t>
             </a:fld>
             <a:endParaRPr lang="en-IN"/>
           </a:p>
@@ -4630,7 +4760,7 @@
           <a:p>
             <a:fld id="{CA0247F9-9AC2-4703-888C-937014C7865D}" type="datetimeFigureOut">
               <a:rPr lang="en-IN" smtClean="0"/>
-              <a:t>06-03-2026</a:t>
+              <a:t>16-03-2026</a:t>
             </a:fld>
             <a:endParaRPr lang="en-IN"/>
           </a:p>
@@ -5023,7 +5153,7 @@
           <a:p>
             <a:fld id="{CA0247F9-9AC2-4703-888C-937014C7865D}" type="datetimeFigureOut">
               <a:rPr lang="en-IN" smtClean="0"/>
-              <a:t>06-03-2026</a:t>
+              <a:t>16-03-2026</a:t>
             </a:fld>
             <a:endParaRPr lang="en-IN"/>
           </a:p>
@@ -5141,7 +5271,7 @@
           <a:p>
             <a:fld id="{CA0247F9-9AC2-4703-888C-937014C7865D}" type="datetimeFigureOut">
               <a:rPr lang="en-IN" smtClean="0"/>
-              <a:t>06-03-2026</a:t>
+              <a:t>16-03-2026</a:t>
             </a:fld>
             <a:endParaRPr lang="en-IN"/>
           </a:p>
@@ -5236,7 +5366,7 @@
           <a:p>
             <a:fld id="{CA0247F9-9AC2-4703-888C-937014C7865D}" type="datetimeFigureOut">
               <a:rPr lang="en-IN" smtClean="0"/>
-              <a:t>06-03-2026</a:t>
+              <a:t>16-03-2026</a:t>
             </a:fld>
             <a:endParaRPr lang="en-IN"/>
           </a:p>
@@ -5509,7 +5639,7 @@
           <a:p>
             <a:fld id="{CA0247F9-9AC2-4703-888C-937014C7865D}" type="datetimeFigureOut">
               <a:rPr lang="en-IN" smtClean="0"/>
-              <a:t>06-03-2026</a:t>
+              <a:t>16-03-2026</a:t>
             </a:fld>
             <a:endParaRPr lang="en-IN"/>
           </a:p>
@@ -5790,7 +5920,7 @@
           <a:p>
             <a:fld id="{CA0247F9-9AC2-4703-888C-937014C7865D}" type="datetimeFigureOut">
               <a:rPr lang="en-IN" smtClean="0"/>
-              <a:t>06-03-2026</a:t>
+              <a:t>16-03-2026</a:t>
             </a:fld>
             <a:endParaRPr lang="en-IN"/>
           </a:p>
@@ -6030,7 +6160,7 @@
           <a:p>
             <a:fld id="{CA0247F9-9AC2-4703-888C-937014C7865D}" type="datetimeFigureOut">
               <a:rPr lang="en-IN" smtClean="0"/>
-              <a:t>06-03-2026</a:t>
+              <a:t>16-03-2026</a:t>
             </a:fld>
             <a:endParaRPr lang="en-IN"/>
           </a:p>
@@ -6933,8 +7063,8 @@
         </p:nvSpPr>
         <p:spPr>
           <a:xfrm>
-            <a:off x="331774" y="1278542"/>
-            <a:ext cx="4385883" cy="5219361"/>
+            <a:off x="339865" y="1488935"/>
+            <a:ext cx="4377792" cy="5008968"/>
           </a:xfrm>
         </p:spPr>
         <p:txBody>
@@ -6945,141 +7075,61 @@
           <a:p>
             <a:r>
               <a:rPr lang="en-US" dirty="0"/>
-              <a:t>This dashboard uses </a:t>
-            </a:r>
-            <a:r>
-              <a:rPr lang="en-US" b="1" dirty="0"/>
-              <a:t>Power BI forecasting capabilities</a:t>
-            </a:r>
-            <a:r>
-              <a:rPr lang="en-US" dirty="0"/>
-              <a:t> to predict future revenue trends based on historical booking data.</a:t>
-            </a:r>
-          </a:p>
-          <a:p>
-            <a:r>
-              <a:rPr lang="en-US" b="1" dirty="0"/>
-              <a:t>Key Metrics</a:t>
-            </a:r>
-            <a:endParaRPr lang="en-US" dirty="0"/>
-          </a:p>
-          <a:p>
-            <a:r>
-              <a:rPr lang="en-US" dirty="0"/>
-              <a:t>• </a:t>
-            </a:r>
-            <a:r>
-              <a:rPr lang="en-US" b="1" dirty="0"/>
-              <a:t>Revenue Growth:</a:t>
-            </a:r>
-            <a:r>
-              <a:rPr lang="en-US" dirty="0"/>
-              <a:t> 60.63%</a:t>
-            </a:r>
-            <a:br>
-              <a:rPr lang="en-US" dirty="0"/>
-            </a:br>
-            <a:r>
-              <a:rPr lang="en-US" dirty="0"/>
-              <a:t>• </a:t>
-            </a:r>
-            <a:r>
-              <a:rPr lang="en-US" b="1" dirty="0"/>
-              <a:t>Average Monthly Revenue:</a:t>
-            </a:r>
-            <a:r>
-              <a:rPr lang="en-US" dirty="0"/>
-              <a:t> ₹999.5K</a:t>
-            </a:r>
-            <a:br>
-              <a:rPr lang="en-US" dirty="0"/>
-            </a:br>
-            <a:r>
-              <a:rPr lang="en-US" dirty="0"/>
-              <a:t>• </a:t>
-            </a:r>
-            <a:r>
-              <a:rPr lang="en-US" b="1" dirty="0"/>
-              <a:t>Last 12 Months Revenue:</a:t>
-            </a:r>
-            <a:r>
-              <a:rPr lang="en-US" dirty="0"/>
-              <a:t> ₹9.81M</a:t>
-            </a:r>
-            <a:br>
-              <a:rPr lang="en-US" dirty="0"/>
-            </a:br>
-            <a:r>
-              <a:rPr lang="en-US" dirty="0"/>
-              <a:t>• </a:t>
-            </a:r>
-            <a:r>
-              <a:rPr lang="en-US" b="1" dirty="0"/>
-              <a:t>Total Revenue:</a:t>
-            </a:r>
-            <a:r>
-              <a:rPr lang="en-US" dirty="0"/>
-              <a:t> ₹25.99M</a:t>
-            </a:r>
-          </a:p>
-          <a:p>
-            <a:r>
-              <a:rPr lang="en-US" b="1" dirty="0"/>
-              <a:t>Key Insights</a:t>
-            </a:r>
-            <a:endParaRPr lang="en-US" dirty="0"/>
-          </a:p>
-          <a:p>
-            <a:r>
-              <a:rPr lang="en-US" dirty="0"/>
-              <a:t>• Revenue trends show </a:t>
-            </a:r>
-            <a:r>
-              <a:rPr lang="en-US" b="1" dirty="0"/>
-              <a:t>consistent growth over time</a:t>
-            </a:r>
-            <a:br>
-              <a:rPr lang="en-US" dirty="0"/>
-            </a:br>
-            <a:r>
-              <a:rPr lang="en-US" dirty="0"/>
-              <a:t>• Forecasting predicts </a:t>
-            </a:r>
-            <a:r>
-              <a:rPr lang="en-US" b="1" dirty="0"/>
-              <a:t>future revenue fluctuations based on historical patterns</a:t>
-            </a:r>
-            <a:br>
-              <a:rPr lang="en-US" dirty="0"/>
-            </a:br>
-            <a:r>
-              <a:rPr lang="en-US" dirty="0"/>
-              <a:t>• Market segment filters help analyze </a:t>
-            </a:r>
-            <a:r>
-              <a:rPr lang="en-US" b="1" dirty="0"/>
-              <a:t>revenue contributions from different booking channels</a:t>
-            </a:r>
-            <a:br>
-              <a:rPr lang="en-US" dirty="0"/>
-            </a:br>
-            <a:r>
-              <a:rPr lang="en-US" dirty="0"/>
-              <a:t>• Year and hotel filters allow deeper analysis of revenue trends</a:t>
-            </a:r>
-          </a:p>
-          <a:p>
-            <a:r>
-              <a:rPr lang="en-US" dirty="0"/>
-              <a:t>Forecasting enables hotel managers to </a:t>
-            </a:r>
-            <a:r>
-              <a:rPr lang="en-US" b="1" dirty="0"/>
-              <a:t>anticipate demand, optimize pricing strategies, and improve long-term revenue planning</a:t>
-            </a:r>
-            <a:r>
-              <a:rPr lang="en-US" dirty="0"/>
-              <a:t>.</a:t>
+              <a:t>This dashboard analyzes hotel booking demand and occupancy patterns across different time periods.</a:t>
+            </a:r>
+          </a:p>
+          <a:p>
+            <a:r>
+              <a:rPr lang="en-US" dirty="0"/>
+              <a:t>Key Metrics:</a:t>
+            </a:r>
+          </a:p>
+          <a:p>
+            <a:r>
+              <a:rPr lang="en-US" dirty="0"/>
+              <a:t>Occupancy Rate</a:t>
+            </a:r>
+          </a:p>
+          <a:p>
+            <a:r>
+              <a:rPr lang="en-US" dirty="0"/>
+              <a:t>Total Bookings</a:t>
+            </a:r>
+          </a:p>
+          <a:p>
+            <a:r>
+              <a:rPr lang="en-US" dirty="0"/>
+              <a:t>Room Capacity</a:t>
+            </a:r>
+          </a:p>
+          <a:p>
+            <a:r>
+              <a:rPr lang="en-US" dirty="0"/>
+              <a:t>Key Insights:</a:t>
+            </a:r>
+          </a:p>
+          <a:p>
+            <a:r>
+              <a:rPr lang="en-US" dirty="0"/>
+              <a:t>City hotels show higher occupancy rates compared to resort hotels</a:t>
+            </a:r>
+          </a:p>
+          <a:p>
+            <a:r>
+              <a:rPr lang="en-US" dirty="0"/>
+              <a:t>Booking demand varies across months indicating seasonal trends</a:t>
+            </a:r>
+          </a:p>
+          <a:p>
+            <a:r>
+              <a:rPr lang="en-US" dirty="0"/>
+              <a:t>Peak demand occurs during mid-year months</a:t>
+            </a:r>
+          </a:p>
+          <a:p>
+            <a:r>
+              <a:rPr lang="en-US" dirty="0"/>
+              <a:t>Market segments influence booking patterns</a:t>
             </a:r>
           </a:p>
         </p:txBody>
@@ -7107,8 +7157,8 @@
         </p:blipFill>
         <p:spPr>
           <a:xfrm>
-            <a:off x="3973190" y="1199447"/>
-            <a:ext cx="8618018" cy="4873625"/>
+            <a:off x="4240226" y="1199447"/>
+            <a:ext cx="8350981" cy="4873625"/>
           </a:xfrm>
           <a:prstGeom prst="rect">
             <a:avLst/>
@@ -7751,10 +7801,15 @@
             <p:ph sz="half" idx="1"/>
           </p:nvPr>
         </p:nvSpPr>
-        <p:spPr/>
+        <p:spPr>
+          <a:xfrm>
+            <a:off x="1455089" y="1825624"/>
+            <a:ext cx="3586038" cy="4667251"/>
+          </a:xfrm>
+        </p:spPr>
         <p:txBody>
           <a:bodyPr>
-            <a:normAutofit lnSpcReduction="10000"/>
+            <a:normAutofit/>
           </a:bodyPr>
           <a:lstStyle/>
           <a:p>
@@ -7771,25 +7826,25 @@
           </a:p>
           <a:p>
             <a:r>
-              <a:rPr lang="en-US" dirty="0"/>
+              <a:rPr lang="en-US" sz="2000" dirty="0"/>
               <a:t>City hotels generate higher revenue</a:t>
             </a:r>
           </a:p>
           <a:p>
             <a:r>
-              <a:rPr lang="en-US" dirty="0"/>
+              <a:rPr lang="en-US" sz="2000" dirty="0"/>
               <a:t>Peak demand occurs during mid-year months</a:t>
             </a:r>
           </a:p>
           <a:p>
             <a:r>
-              <a:rPr lang="en-US" dirty="0"/>
+              <a:rPr lang="en-US" sz="2000" dirty="0"/>
               <a:t>Online travel agencies dominate bookings</a:t>
             </a:r>
           </a:p>
           <a:p>
             <a:r>
-              <a:rPr lang="en-US" dirty="0"/>
+              <a:rPr lang="en-US" sz="2000" dirty="0"/>
               <a:t>High cancellations lead to revenue loss</a:t>
             </a:r>
           </a:p>
@@ -7822,7 +7877,7 @@
         </p:spPr>
         <p:txBody>
           <a:bodyPr>
-            <a:normAutofit lnSpcReduction="10000"/>
+            <a:normAutofit/>
           </a:bodyPr>
           <a:lstStyle/>
           <a:p>
@@ -7862,8 +7917,8 @@
         </p:nvSpPr>
         <p:spPr bwMode="auto">
           <a:xfrm>
-            <a:off x="6233822" y="2649076"/>
-            <a:ext cx="4587903" cy="3354765"/>
+            <a:off x="6329238" y="2722942"/>
+            <a:ext cx="3856382" cy="3477875"/>
           </a:xfrm>
           <a:prstGeom prst="rect">
             <a:avLst/>
@@ -7911,130 +7966,36 @@
           </a:bodyPr>
           <a:lstStyle/>
           <a:p>
-            <a:pPr marL="0" marR="0" lvl="0" indent="0" algn="l" defTabSz="914400" rtl="0" eaLnBrk="0" fontAlgn="base" latinLnBrk="0" hangingPunct="0">
-              <a:lnSpc>
-                <a:spcPct val="100000"/>
-              </a:lnSpc>
-              <a:spcBef>
-                <a:spcPct val="0"/>
-              </a:spcBef>
-              <a:spcAft>
-                <a:spcPct val="0"/>
-              </a:spcAft>
-              <a:buClrTx/>
-              <a:buSzTx/>
-              <a:buFontTx/>
-              <a:buChar char="•"/>
-              <a:tabLst/>
-            </a:pPr>
-            <a:r>
-              <a:rPr kumimoji="0" lang="en-US" altLang="en-US" sz="2800" b="0" i="0" u="none" strike="noStrike" cap="none" normalizeH="0" baseline="0" dirty="0">
-                <a:ln>
-                  <a:noFill/>
-                </a:ln>
-                <a:solidFill>
-                  <a:schemeClr val="tx1"/>
-                </a:solidFill>
-                <a:effectLst/>
-                <a:latin typeface="Arial" panose="020B0604020202020204" pitchFamily="34" charset="0"/>
-              </a:rPr>
-              <a:t>better pricing strategies</a:t>
-            </a:r>
-          </a:p>
-          <a:p>
-            <a:pPr marL="0" marR="0" lvl="0" indent="0" algn="l" defTabSz="914400" rtl="0" eaLnBrk="0" fontAlgn="base" latinLnBrk="0" hangingPunct="0">
-              <a:lnSpc>
-                <a:spcPct val="100000"/>
-              </a:lnSpc>
-              <a:spcBef>
-                <a:spcPct val="0"/>
-              </a:spcBef>
-              <a:spcAft>
-                <a:spcPct val="0"/>
-              </a:spcAft>
-              <a:buClrTx/>
-              <a:buSzTx/>
-              <a:buFontTx/>
-              <a:buChar char="•"/>
-              <a:tabLst/>
-            </a:pPr>
-            <a:r>
-              <a:rPr kumimoji="0" lang="en-US" altLang="en-US" sz="2800" b="0" i="0" u="none" strike="noStrike" cap="none" normalizeH="0" baseline="0" dirty="0">
-                <a:ln>
-                  <a:noFill/>
-                </a:ln>
-                <a:solidFill>
-                  <a:schemeClr val="tx1"/>
-                </a:solidFill>
-                <a:effectLst/>
-                <a:latin typeface="Arial" panose="020B0604020202020204" pitchFamily="34" charset="0"/>
-              </a:rPr>
-              <a:t>improved occupancy planning</a:t>
-            </a:r>
-          </a:p>
-          <a:p>
-            <a:pPr marL="0" marR="0" lvl="0" indent="0" algn="l" defTabSz="914400" rtl="0" eaLnBrk="0" fontAlgn="base" latinLnBrk="0" hangingPunct="0">
-              <a:lnSpc>
-                <a:spcPct val="100000"/>
-              </a:lnSpc>
-              <a:spcBef>
-                <a:spcPct val="0"/>
-              </a:spcBef>
-              <a:spcAft>
-                <a:spcPct val="0"/>
-              </a:spcAft>
-              <a:buClrTx/>
-              <a:buSzTx/>
-              <a:buFontTx/>
-              <a:buChar char="•"/>
-              <a:tabLst/>
-            </a:pPr>
-            <a:r>
-              <a:rPr kumimoji="0" lang="en-US" altLang="en-US" sz="2800" b="0" i="0" u="none" strike="noStrike" cap="none" normalizeH="0" baseline="0" dirty="0">
-                <a:ln>
-                  <a:noFill/>
-                </a:ln>
-                <a:solidFill>
-                  <a:schemeClr val="tx1"/>
-                </a:solidFill>
-                <a:effectLst/>
-                <a:latin typeface="Arial" panose="020B0604020202020204" pitchFamily="34" charset="0"/>
-              </a:rPr>
-              <a:t>reduced cancellations</a:t>
-            </a:r>
-          </a:p>
-          <a:p>
-            <a:pPr marL="0" marR="0" lvl="0" indent="0" algn="l" defTabSz="914400" rtl="0" eaLnBrk="0" fontAlgn="base" latinLnBrk="0" hangingPunct="0">
-              <a:lnSpc>
-                <a:spcPct val="100000"/>
-              </a:lnSpc>
-              <a:spcBef>
-                <a:spcPct val="0"/>
-              </a:spcBef>
-              <a:spcAft>
-                <a:spcPct val="0"/>
-              </a:spcAft>
-              <a:buClrTx/>
-              <a:buSzTx/>
-              <a:buFontTx/>
-              <a:buChar char="•"/>
-              <a:tabLst/>
-            </a:pPr>
-            <a:r>
-              <a:rPr kumimoji="0" lang="en-US" altLang="en-US" sz="2800" b="0" i="0" u="none" strike="noStrike" cap="none" normalizeH="0" baseline="0" dirty="0">
-                <a:ln>
-                  <a:noFill/>
-                </a:ln>
-                <a:solidFill>
-                  <a:schemeClr val="tx1"/>
-                </a:solidFill>
-                <a:effectLst/>
-                <a:latin typeface="Arial" panose="020B0604020202020204" pitchFamily="34" charset="0"/>
-              </a:rPr>
-              <a:t>better demand forecasting</a:t>
+            <a:r>
+              <a:rPr lang="en-US" sz="2000" dirty="0"/>
+              <a:t>The insights derived from the dashboards help hotel managers:</a:t>
+            </a:r>
+          </a:p>
+          <a:p>
+            <a:r>
+              <a:rPr lang="en-US" sz="2000" dirty="0"/>
+              <a:t>•   Optimize pricing strategies     	based on demand trends</a:t>
+            </a:r>
+          </a:p>
+          <a:p>
+            <a:r>
+              <a:rPr lang="en-US" sz="2000" dirty="0"/>
+              <a:t>•   Improve occupancy planning 	and room allocation</a:t>
+            </a:r>
+          </a:p>
+          <a:p>
+            <a:r>
+              <a:rPr lang="en-US" sz="2000" dirty="0"/>
+              <a:t>•   Reduce revenue loss caused 	by booking cancellations</a:t>
+            </a:r>
+          </a:p>
+          <a:p>
+            <a:r>
+              <a:rPr lang="en-US" sz="2000" dirty="0"/>
+              <a:t>•   Improve demand forecasting 	and revenue planning</a:t>
             </a:r>
             <a:br>
-              <a:rPr kumimoji="0" lang="en-US" altLang="en-US" sz="2800" b="0" i="0" u="none" strike="noStrike" cap="none" normalizeH="0" baseline="0" dirty="0">
+              <a:rPr kumimoji="0" lang="en-US" altLang="en-US" sz="2000" b="0" i="0" u="none" strike="noStrike" cap="none" normalizeH="0" baseline="0" dirty="0">
                 <a:ln>
                   <a:noFill/>
                 </a:ln>
@@ -8045,43 +8006,7 @@
                 <a:latin typeface="Arial" panose="020B0604020202020204" pitchFamily="34" charset="0"/>
               </a:rPr>
             </a:br>
-            <a:br>
-              <a:rPr kumimoji="0" lang="en-US" altLang="en-US" sz="1800" b="0" i="0" u="none" strike="noStrike" cap="none" normalizeH="0" baseline="0" dirty="0">
-                <a:ln>
-                  <a:noFill/>
-                </a:ln>
-                <a:solidFill>
-                  <a:schemeClr val="tx1"/>
-                </a:solidFill>
-                <a:effectLst/>
-                <a:latin typeface="Arial" panose="020B0604020202020204" pitchFamily="34" charset="0"/>
-              </a:rPr>
-            </a:br>
-            <a:br>
-              <a:rPr kumimoji="0" lang="en-US" altLang="en-US" sz="1800" b="0" i="0" u="none" strike="noStrike" cap="none" normalizeH="0" baseline="0" dirty="0">
-                <a:ln>
-                  <a:noFill/>
-                </a:ln>
-                <a:solidFill>
-                  <a:schemeClr val="tx1"/>
-                </a:solidFill>
-                <a:effectLst/>
-                <a:latin typeface="Arial" panose="020B0604020202020204" pitchFamily="34" charset="0"/>
-              </a:rPr>
-            </a:br>
-            <a:br>
-              <a:rPr kumimoji="0" lang="en-US" altLang="en-US" sz="1800" b="0" i="0" u="none" strike="noStrike" cap="none" normalizeH="0" baseline="0" dirty="0">
-                <a:ln>
-                  <a:noFill/>
-                </a:ln>
-                <a:solidFill>
-                  <a:schemeClr val="tx1"/>
-                </a:solidFill>
-                <a:effectLst/>
-                <a:latin typeface="Arial" panose="020B0604020202020204" pitchFamily="34" charset="0"/>
-              </a:rPr>
-            </a:br>
-            <a:endParaRPr kumimoji="0" lang="en-US" altLang="en-US" sz="1800" b="0" i="0" u="none" strike="noStrike" cap="none" normalizeH="0" baseline="0" dirty="0">
+            <a:endParaRPr kumimoji="0" lang="en-US" altLang="en-US" sz="2000" b="0" i="0" u="none" strike="noStrike" cap="none" normalizeH="0" baseline="0" dirty="0">
               <a:ln>
                 <a:noFill/>
               </a:ln>
@@ -8188,37 +8113,36 @@
         <p:spPr>
           <a:xfrm>
             <a:off x="838200" y="1825625"/>
-            <a:ext cx="9315616" cy="2245443"/>
+            <a:ext cx="9697278" cy="3271161"/>
           </a:xfrm>
         </p:spPr>
         <p:txBody>
-          <a:bodyPr/>
+          <a:bodyPr>
+            <a:normAutofit lnSpcReduction="10000"/>
+          </a:bodyPr>
           <a:lstStyle/>
           <a:p>
             <a:r>
               <a:rPr lang="en-US" dirty="0"/>
-              <a:t>Summarize:</a:t>
-            </a:r>
-          </a:p>
-          <a:p>
-            <a:r>
-              <a:rPr lang="en-US" dirty="0"/>
-              <a:t>dashboards help analyze hotel performance</a:t>
-            </a:r>
-          </a:p>
-          <a:p>
-            <a:r>
-              <a:rPr lang="en-US" dirty="0"/>
-              <a:t>insights help management make decisions</a:t>
-            </a:r>
-          </a:p>
-          <a:p>
-            <a:r>
-              <a:rPr lang="en-US" dirty="0"/>
-              <a:t>future work includes ML predictions</a:t>
-            </a:r>
-          </a:p>
-          <a:p>
+              <a:t>This project demonstrates how Power BI dashboards can transform hotel booking data into meaningful business insights.</a:t>
+            </a:r>
+          </a:p>
+          <a:p>
+            <a:r>
+              <a:rPr lang="en-US" dirty="0"/>
+              <a:t>Through revenue analysis, occupancy trends, cancellation behavior, and forecasting models, hotel managers can better understand booking patterns and optimize revenue strategies.</a:t>
+            </a:r>
+          </a:p>
+          <a:p>
+            <a:r>
+              <a:rPr lang="en-US" dirty="0"/>
+              <a:t>Interactive dashboards allow stakeholders to monitor performance and make data-driven decisions.</a:t>
+            </a:r>
+          </a:p>
+          <a:p>
+            <a:pPr marL="0" indent="0">
+              <a:buNone/>
+            </a:pPr>
             <a:endParaRPr lang="en-IN" dirty="0"/>
           </a:p>
         </p:txBody>
@@ -8505,7 +8429,7 @@
         </p:nvSpPr>
         <p:spPr>
           <a:xfrm>
-            <a:off x="892136" y="796690"/>
+            <a:off x="649202" y="1458725"/>
             <a:ext cx="4486656" cy="1141497"/>
           </a:xfrm>
         </p:spPr>
@@ -8549,7 +8473,7 @@
         </p:nvSpPr>
         <p:spPr>
           <a:xfrm>
-            <a:off x="6450168" y="1514384"/>
+            <a:off x="6346801" y="1458725"/>
             <a:ext cx="5195997" cy="4572000"/>
           </a:xfrm>
         </p:spPr>
@@ -8630,8 +8554,8 @@
         </p:nvSpPr>
         <p:spPr>
           <a:xfrm>
-            <a:off x="1238084" y="2484443"/>
-            <a:ext cx="3794760" cy="2194036"/>
+            <a:off x="1238084" y="3080790"/>
+            <a:ext cx="4140708" cy="3057616"/>
           </a:xfrm>
           <a:noFill/>
           <a:scene3d>
@@ -8642,7 +8566,7 @@
         </p:spPr>
         <p:txBody>
           <a:bodyPr>
-            <a:normAutofit fontScale="85000" lnSpcReduction="10000"/>
+            <a:normAutofit fontScale="92500" lnSpcReduction="20000"/>
           </a:bodyPr>
           <a:lstStyle/>
           <a:p>
@@ -8650,22 +8574,15 @@
               <a:rPr lang="en-US" sz="2000" dirty="0"/>
             </a:br>
             <a:r>
-              <a:rPr lang="en-US" sz="2000" dirty="0"/>
+              <a:rPr lang="en-US" sz="3200" dirty="0"/>
               <a:t>Hotels often face challenges in understanding booking patterns, customer behavior, and revenue trends.</a:t>
             </a:r>
             <a:br>
-              <a:rPr lang="en-US" sz="2000" dirty="0"/>
+              <a:rPr lang="en-US" sz="3200" dirty="0"/>
             </a:br>
             <a:br>
-              <a:rPr lang="en-US" sz="2000" dirty="0"/>
+              <a:rPr lang="en-US" sz="3200" dirty="0"/>
             </a:br>
-            <a:br>
-              <a:rPr lang="en-US" sz="2000" dirty="0"/>
-            </a:br>
-            <a:r>
-              <a:rPr lang="en-US" sz="2000" dirty="0"/>
-              <a:t>Hotels often face challenges in understanding booking patterns, customer behavior, and revenue trends.</a:t>
-            </a:r>
             <a:endParaRPr lang="en-IN" sz="2000" dirty="0"/>
           </a:p>
         </p:txBody>
@@ -10488,4 +10405,299 @@
     </a:ext>
   </a:extLst>
 </a:theme>
+</file>
+
+<file path=ppt/theme/theme2.xml><?xml version="1.0" encoding="utf-8"?>
+<a:theme xmlns:a="http://schemas.openxmlformats.org/drawingml/2006/main" name="Office Theme">
+  <a:themeElements>
+    <a:clrScheme name="Office">
+      <a:dk1>
+        <a:sysClr val="windowText" lastClr="000000"/>
+      </a:dk1>
+      <a:lt1>
+        <a:sysClr val="window" lastClr="FFFFFF"/>
+      </a:lt1>
+      <a:dk2>
+        <a:srgbClr val="44546A"/>
+      </a:dk2>
+      <a:lt2>
+        <a:srgbClr val="E7E6E6"/>
+      </a:lt2>
+      <a:accent1>
+        <a:srgbClr val="4472C4"/>
+      </a:accent1>
+      <a:accent2>
+        <a:srgbClr val="ED7D31"/>
+      </a:accent2>
+      <a:accent3>
+        <a:srgbClr val="A5A5A5"/>
+      </a:accent3>
+      <a:accent4>
+        <a:srgbClr val="FFC000"/>
+      </a:accent4>
+      <a:accent5>
+        <a:srgbClr val="5B9BD5"/>
+      </a:accent5>
+      <a:accent6>
+        <a:srgbClr val="70AD47"/>
+      </a:accent6>
+      <a:hlink>
+        <a:srgbClr val="0563C1"/>
+      </a:hlink>
+      <a:folHlink>
+        <a:srgbClr val="954F72"/>
+      </a:folHlink>
+    </a:clrScheme>
+    <a:fontScheme name="Office">
+      <a:majorFont>
+        <a:latin typeface="Calibri Light" panose="020F0302020204030204"/>
+        <a:ea typeface=""/>
+        <a:cs typeface=""/>
+        <a:font script="Jpan" typeface="游ゴシック Light"/>
+        <a:font script="Hang" typeface="맑은 고딕"/>
+        <a:font script="Hans" typeface="等线 Light"/>
+        <a:font script="Hant" typeface="新細明體"/>
+        <a:font script="Arab" typeface="Times New Roman"/>
+        <a:font script="Hebr" typeface="Times New Roman"/>
+        <a:font script="Thai" typeface="Angsana New"/>
+        <a:font script="Ethi" typeface="Nyala"/>
+        <a:font script="Beng" typeface="Vrinda"/>
+        <a:font script="Gujr" typeface="Shruti"/>
+        <a:font script="Khmr" typeface="MoolBoran"/>
+        <a:font script="Knda" typeface="Tunga"/>
+        <a:font script="Guru" typeface="Raavi"/>
+        <a:font script="Cans" typeface="Euphemia"/>
+        <a:font script="Cher" typeface="Plantagenet Cherokee"/>
+        <a:font script="Yiii" typeface="Microsoft Yi Baiti"/>
+        <a:font script="Tibt" typeface="Microsoft Himalaya"/>
+        <a:font script="Thaa" typeface="MV Boli"/>
+        <a:font script="Deva" typeface="Mangal"/>
+        <a:font script="Telu" typeface="Gautami"/>
+        <a:font script="Taml" typeface="Latha"/>
+        <a:font script="Syrc" typeface="Estrangelo Edessa"/>
+        <a:font script="Orya" typeface="Kalinga"/>
+        <a:font script="Mlym" typeface="Kartika"/>
+        <a:font script="Laoo" typeface="DokChampa"/>
+        <a:font script="Sinh" typeface="Iskoola Pota"/>
+        <a:font script="Mong" typeface="Mongolian Baiti"/>
+        <a:font script="Viet" typeface="Times New Roman"/>
+        <a:font script="Uigh" typeface="Microsoft Uighur"/>
+        <a:font script="Geor" typeface="Sylfaen"/>
+        <a:font script="Armn" typeface="Arial"/>
+        <a:font script="Bugi" typeface="Leelawadee UI"/>
+        <a:font script="Bopo" typeface="Microsoft JhengHei"/>
+        <a:font script="Java" typeface="Javanese Text"/>
+        <a:font script="Lisu" typeface="Segoe UI"/>
+        <a:font script="Mymr" typeface="Myanmar Text"/>
+        <a:font script="Nkoo" typeface="Ebrima"/>
+        <a:font script="Olck" typeface="Nirmala UI"/>
+        <a:font script="Osma" typeface="Ebrima"/>
+        <a:font script="Phag" typeface="Phagspa"/>
+        <a:font script="Syrn" typeface="Estrangelo Edessa"/>
+        <a:font script="Syrj" typeface="Estrangelo Edessa"/>
+        <a:font script="Syre" typeface="Estrangelo Edessa"/>
+        <a:font script="Sora" typeface="Nirmala UI"/>
+        <a:font script="Tale" typeface="Microsoft Tai Le"/>
+        <a:font script="Talu" typeface="Microsoft New Tai Lue"/>
+        <a:font script="Tfng" typeface="Ebrima"/>
+      </a:majorFont>
+      <a:minorFont>
+        <a:latin typeface="Calibri" panose="020F0502020204030204"/>
+        <a:ea typeface=""/>
+        <a:cs typeface=""/>
+        <a:font script="Jpan" typeface="游ゴシック"/>
+        <a:font script="Hang" typeface="맑은 고딕"/>
+        <a:font script="Hans" typeface="等线"/>
+        <a:font script="Hant" typeface="新細明體"/>
+        <a:font script="Arab" typeface="Arial"/>
+        <a:font script="Hebr" typeface="Arial"/>
+        <a:font script="Thai" typeface="Cordia New"/>
+        <a:font script="Ethi" typeface="Nyala"/>
+        <a:font script="Beng" typeface="Vrinda"/>
+        <a:font script="Gujr" typeface="Shruti"/>
+        <a:font script="Khmr" typeface="DaunPenh"/>
+        <a:font script="Knda" typeface="Tunga"/>
+        <a:font script="Guru" typeface="Raavi"/>
+        <a:font script="Cans" typeface="Euphemia"/>
+        <a:font script="Cher" typeface="Plantagenet Cherokee"/>
+        <a:font script="Yiii" typeface="Microsoft Yi Baiti"/>
+        <a:font script="Tibt" typeface="Microsoft Himalaya"/>
+        <a:font script="Thaa" typeface="MV Boli"/>
+        <a:font script="Deva" typeface="Mangal"/>
+        <a:font script="Telu" typeface="Gautami"/>
+        <a:font script="Taml" typeface="Latha"/>
+        <a:font script="Syrc" typeface="Estrangelo Edessa"/>
+        <a:font script="Orya" typeface="Kalinga"/>
+        <a:font script="Mlym" typeface="Kartika"/>
+        <a:font script="Laoo" typeface="DokChampa"/>
+        <a:font script="Sinh" typeface="Iskoola Pota"/>
+        <a:font script="Mong" typeface="Mongolian Baiti"/>
+        <a:font script="Viet" typeface="Arial"/>
+        <a:font script="Uigh" typeface="Microsoft Uighur"/>
+        <a:font script="Geor" typeface="Sylfaen"/>
+        <a:font script="Armn" typeface="Arial"/>
+        <a:font script="Bugi" typeface="Leelawadee UI"/>
+        <a:font script="Bopo" typeface="Microsoft JhengHei"/>
+        <a:font script="Java" typeface="Javanese Text"/>
+        <a:font script="Lisu" typeface="Segoe UI"/>
+        <a:font script="Mymr" typeface="Myanmar Text"/>
+        <a:font script="Nkoo" typeface="Ebrima"/>
+        <a:font script="Olck" typeface="Nirmala UI"/>
+        <a:font script="Osma" typeface="Ebrima"/>
+        <a:font script="Phag" typeface="Phagspa"/>
+        <a:font script="Syrn" typeface="Estrangelo Edessa"/>
+        <a:font script="Syrj" typeface="Estrangelo Edessa"/>
+        <a:font script="Syre" typeface="Estrangelo Edessa"/>
+        <a:font script="Sora" typeface="Nirmala UI"/>
+        <a:font script="Tale" typeface="Microsoft Tai Le"/>
+        <a:font script="Talu" typeface="Microsoft New Tai Lue"/>
+        <a:font script="Tfng" typeface="Ebrima"/>
+      </a:minorFont>
+    </a:fontScheme>
+    <a:fmtScheme name="Office">
+      <a:fillStyleLst>
+        <a:solidFill>
+          <a:schemeClr val="phClr"/>
+        </a:solidFill>
+        <a:gradFill rotWithShape="1">
+          <a:gsLst>
+            <a:gs pos="0">
+              <a:schemeClr val="phClr">
+                <a:lumMod val="110000"/>
+                <a:satMod val="105000"/>
+                <a:tint val="67000"/>
+              </a:schemeClr>
+            </a:gs>
+            <a:gs pos="50000">
+              <a:schemeClr val="phClr">
+                <a:lumMod val="105000"/>
+                <a:satMod val="103000"/>
+                <a:tint val="73000"/>
+              </a:schemeClr>
+            </a:gs>
+            <a:gs pos="100000">
+              <a:schemeClr val="phClr">
+                <a:lumMod val="105000"/>
+                <a:satMod val="109000"/>
+                <a:tint val="81000"/>
+              </a:schemeClr>
+            </a:gs>
+          </a:gsLst>
+          <a:lin ang="5400000" scaled="0"/>
+        </a:gradFill>
+        <a:gradFill rotWithShape="1">
+          <a:gsLst>
+            <a:gs pos="0">
+              <a:schemeClr val="phClr">
+                <a:satMod val="103000"/>
+                <a:lumMod val="102000"/>
+                <a:tint val="94000"/>
+              </a:schemeClr>
+            </a:gs>
+            <a:gs pos="50000">
+              <a:schemeClr val="phClr">
+                <a:satMod val="110000"/>
+                <a:lumMod val="100000"/>
+                <a:shade val="100000"/>
+              </a:schemeClr>
+            </a:gs>
+            <a:gs pos="100000">
+              <a:schemeClr val="phClr">
+                <a:lumMod val="99000"/>
+                <a:satMod val="120000"/>
+                <a:shade val="78000"/>
+              </a:schemeClr>
+            </a:gs>
+          </a:gsLst>
+          <a:lin ang="5400000" scaled="0"/>
+        </a:gradFill>
+      </a:fillStyleLst>
+      <a:lnStyleLst>
+        <a:ln w="6350" cap="flat" cmpd="sng" algn="ctr">
+          <a:solidFill>
+            <a:schemeClr val="phClr"/>
+          </a:solidFill>
+          <a:prstDash val="solid"/>
+          <a:miter lim="800000"/>
+        </a:ln>
+        <a:ln w="12700" cap="flat" cmpd="sng" algn="ctr">
+          <a:solidFill>
+            <a:schemeClr val="phClr"/>
+          </a:solidFill>
+          <a:prstDash val="solid"/>
+          <a:miter lim="800000"/>
+        </a:ln>
+        <a:ln w="19050" cap="flat" cmpd="sng" algn="ctr">
+          <a:solidFill>
+            <a:schemeClr val="phClr"/>
+          </a:solidFill>
+          <a:prstDash val="solid"/>
+          <a:miter lim="800000"/>
+        </a:ln>
+      </a:lnStyleLst>
+      <a:effectStyleLst>
+        <a:effectStyle>
+          <a:effectLst/>
+        </a:effectStyle>
+        <a:effectStyle>
+          <a:effectLst/>
+        </a:effectStyle>
+        <a:effectStyle>
+          <a:effectLst>
+            <a:outerShdw blurRad="57150" dist="19050" dir="5400000" algn="ctr" rotWithShape="0">
+              <a:srgbClr val="000000">
+                <a:alpha val="63000"/>
+              </a:srgbClr>
+            </a:outerShdw>
+          </a:effectLst>
+        </a:effectStyle>
+      </a:effectStyleLst>
+      <a:bgFillStyleLst>
+        <a:solidFill>
+          <a:schemeClr val="phClr"/>
+        </a:solidFill>
+        <a:solidFill>
+          <a:schemeClr val="phClr">
+            <a:tint val="95000"/>
+            <a:satMod val="170000"/>
+          </a:schemeClr>
+        </a:solidFill>
+        <a:gradFill rotWithShape="1">
+          <a:gsLst>
+            <a:gs pos="0">
+              <a:schemeClr val="phClr">
+                <a:tint val="93000"/>
+                <a:satMod val="150000"/>
+                <a:shade val="98000"/>
+                <a:lumMod val="102000"/>
+              </a:schemeClr>
+            </a:gs>
+            <a:gs pos="50000">
+              <a:schemeClr val="phClr">
+                <a:tint val="98000"/>
+                <a:satMod val="130000"/>
+                <a:shade val="90000"/>
+                <a:lumMod val="103000"/>
+              </a:schemeClr>
+            </a:gs>
+            <a:gs pos="100000">
+              <a:schemeClr val="phClr">
+                <a:shade val="63000"/>
+                <a:satMod val="120000"/>
+              </a:schemeClr>
+            </a:gs>
+          </a:gsLst>
+          <a:lin ang="5400000" scaled="0"/>
+        </a:gradFill>
+      </a:bgFillStyleLst>
+    </a:fmtScheme>
+  </a:themeElements>
+  <a:objectDefaults/>
+  <a:extraClrSchemeLst/>
+  <a:extLst>
+    <a:ext uri="{05A4C25C-085E-4340-85A3-A5531E510DB2}">
+      <thm15:themeFamily xmlns:thm15="http://schemas.microsoft.com/office/thememl/2012/main" name="Office Theme" id="{62F939B6-93AF-4DB8-9C6B-D6C7DFDC589F}" vid="{4A3C46E8-61CC-4603-A589-7422A47A8E4A}"/>
+    </a:ext>
+  </a:extLst>
+</a:theme>
 </file>